--- a/public/assets/editable/professional-logo-design-sales-presentation-2/es/Professional Logo Design Sales Presentation - es.pptx
+++ b/public/assets/editable/professional-logo-design-sales-presentation-2/es/Professional Logo Design Sales Presentation - es.pptx
@@ -2030,16 +2030,59 @@
         <p:spPr>
           <a:xfrm>
             <a:off x="457200" y="868680"/>
-            <a:ext cx="10972800" cy="594360"/>
-          </a:xfrm>
-          <a:prstGeom prst="rect">
-            <a:avLst/>
-          </a:prstGeom>
-          <a:noFill/>
-          <a:ln/>
-        </p:spPr>
-        <p:txBody>
-          <a:bodyPr wrap="square" rtlCol="0" anchor="ctr"/>
+            <a:ext cx="6949440" cy="502920"/>
+          </a:xfrm>
+          <a:prstGeom prst="rect">
+            <a:avLst/>
+          </a:prstGeom>
+          <a:noFill/>
+          <a:ln/>
+        </p:spPr>
+        <p:txBody>
+          <a:bodyPr wrap="square" rtlCol="0" anchor="t">
+            <a:normAutofit/>
+          </a:bodyPr>
+          <a:lstStyle/>
+          <a:p>
+            <a:pPr indent="0" marL="0">
+              <a:buNone/>
+            </a:pPr>
+            <a:r>
+              <a:rPr lang="en-US" sz="2200" b="1" dirty="0">
+                <a:solidFill>
+                  <a:srgbClr val="1A1A1A"/>
+                </a:solidFill>
+                <a:latin typeface="Arial" pitchFamily="34" charset="0"/>
+                <a:ea typeface="Arial" pitchFamily="34" charset="-122"/>
+                <a:cs typeface="Arial" pitchFamily="34" charset="-120"/>
+              </a:rPr>
+              <a:t>Diseño de Logotipo Profesional</a:t>
+            </a:r>
+            <a:endParaRPr lang="en-US" sz="2200" dirty="0"/>
+          </a:p>
+        </p:txBody>
+      </p:sp>
+      <p:sp>
+        <p:nvSpPr>
+          <p:cNvPr id="5" name="Text 3"/>
+          <p:cNvSpPr/>
+          <p:nvPr/>
+        </p:nvSpPr>
+        <p:spPr>
+          <a:xfrm>
+            <a:off x="457200" y="1481328"/>
+            <a:ext cx="6949440" cy="820928"/>
+          </a:xfrm>
+          <a:prstGeom prst="rect">
+            <a:avLst/>
+          </a:prstGeom>
+          <a:noFill/>
+          <a:ln/>
+        </p:spPr>
+        <p:txBody>
+          <a:bodyPr wrap="square" rtlCol="0" anchor="t">
+            <a:normAutofit/>
+          </a:bodyPr>
           <a:lstStyle/>
           <a:p>
             <a:pPr indent="0" marL="0">
@@ -2062,62 +2105,25 @@
       </p:sp>
       <p:sp>
         <p:nvSpPr>
-          <p:cNvPr id="5" name="Text 3"/>
-          <p:cNvSpPr/>
-          <p:nvPr/>
-        </p:nvSpPr>
-        <p:spPr>
-          <a:xfrm>
-            <a:off x="457200" y="1645920"/>
-            <a:ext cx="10972800" cy="594360"/>
-          </a:xfrm>
-          <a:prstGeom prst="rect">
-            <a:avLst/>
-          </a:prstGeom>
-          <a:noFill/>
-          <a:ln/>
-        </p:spPr>
-        <p:txBody>
-          <a:bodyPr wrap="square" rtlCol="0" anchor="ctr"/>
-          <a:lstStyle/>
-          <a:p>
-            <a:pPr indent="0" marL="0">
-              <a:buNone/>
-            </a:pPr>
-            <a:r>
-              <a:rPr lang="en-US" sz="2200" b="1" dirty="0">
-                <a:solidFill>
-                  <a:srgbClr val="1A1A1A"/>
-                </a:solidFill>
-                <a:latin typeface="Arial" pitchFamily="34" charset="0"/>
-                <a:ea typeface="Arial" pitchFamily="34" charset="-122"/>
-                <a:cs typeface="Arial" pitchFamily="34" charset="-120"/>
-              </a:rPr>
-              <a:t>DISEÑO DE LOGOTIPO PROFESIONAL</a:t>
-            </a:r>
-            <a:endParaRPr lang="en-US" sz="2200" dirty="0"/>
-          </a:p>
-        </p:txBody>
-      </p:sp>
-      <p:sp>
-        <p:nvSpPr>
           <p:cNvPr id="6" name="Text 4"/>
           <p:cNvSpPr/>
           <p:nvPr/>
         </p:nvSpPr>
         <p:spPr>
           <a:xfrm>
-            <a:off x="457200" y="2240280"/>
-            <a:ext cx="10972800" cy="822960"/>
-          </a:xfrm>
-          <a:prstGeom prst="rect">
-            <a:avLst/>
-          </a:prstGeom>
-          <a:noFill/>
-          <a:ln/>
-        </p:spPr>
-        <p:txBody>
-          <a:bodyPr wrap="square" rtlCol="0" anchor="t"/>
+            <a:off x="457200" y="2411984"/>
+            <a:ext cx="6949440" cy="502920"/>
+          </a:xfrm>
+          <a:prstGeom prst="rect">
+            <a:avLst/>
+          </a:prstGeom>
+          <a:noFill/>
+          <a:ln/>
+        </p:spPr>
+        <p:txBody>
+          <a:bodyPr wrap="square" rtlCol="0" anchor="t">
+            <a:normAutofit/>
+          </a:bodyPr>
           <a:lstStyle/>
           <a:p>
             <a:pPr indent="0" marL="0">
@@ -2154,8 +2160,8 @@
         </p:blipFill>
         <p:spPr>
           <a:xfrm>
-            <a:off x="7772400" y="1097280"/>
-            <a:ext cx="3657600" cy="2286000"/>
+            <a:off x="7680960" y="1005840"/>
+            <a:ext cx="3840480" cy="2560320"/>
           </a:xfrm>
           <a:prstGeom prst="rect">
             <a:avLst/>
@@ -2272,6 +2278,88 @@
           </a:p>
         </p:txBody>
       </p:sp>
+      <p:sp>
+        <p:nvSpPr>
+          <p:cNvPr id="4" name="Text 2"/>
+          <p:cNvSpPr/>
+          <p:nvPr/>
+        </p:nvSpPr>
+        <p:spPr>
+          <a:xfrm>
+            <a:off x="457200" y="868680"/>
+            <a:ext cx="10972800" cy="502920"/>
+          </a:xfrm>
+          <a:prstGeom prst="rect">
+            <a:avLst/>
+          </a:prstGeom>
+          <a:noFill/>
+          <a:ln/>
+        </p:spPr>
+        <p:txBody>
+          <a:bodyPr wrap="square" rtlCol="0" anchor="t">
+            <a:normAutofit/>
+          </a:bodyPr>
+          <a:lstStyle/>
+          <a:p>
+            <a:pPr indent="0" marL="0">
+              <a:buNone/>
+            </a:pPr>
+            <a:r>
+              <a:rPr lang="en-US" sz="2200" b="1" dirty="0">
+                <a:solidFill>
+                  <a:srgbClr val="1A1A1A"/>
+                </a:solidFill>
+                <a:latin typeface="Arial" pitchFamily="34" charset="0"/>
+                <a:ea typeface="Arial" pitchFamily="34" charset="-122"/>
+                <a:cs typeface="Arial" pitchFamily="34" charset="-120"/>
+              </a:rPr>
+              <a:t>Manejo de objeciones</a:t>
+            </a:r>
+            <a:endParaRPr lang="en-US" sz="2200" dirty="0"/>
+          </a:p>
+        </p:txBody>
+      </p:sp>
+      <p:sp>
+        <p:nvSpPr>
+          <p:cNvPr id="5" name="Text 3"/>
+          <p:cNvSpPr/>
+          <p:nvPr/>
+        </p:nvSpPr>
+        <p:spPr>
+          <a:xfrm>
+            <a:off x="457200" y="1481328"/>
+            <a:ext cx="10972800" cy="502920"/>
+          </a:xfrm>
+          <a:prstGeom prst="rect">
+            <a:avLst/>
+          </a:prstGeom>
+          <a:noFill/>
+          <a:ln/>
+        </p:spPr>
+        <p:txBody>
+          <a:bodyPr wrap="square" rtlCol="0" anchor="t">
+            <a:normAutofit/>
+          </a:bodyPr>
+          <a:lstStyle/>
+          <a:p>
+            <a:pPr indent="0" marL="0">
+              <a:buNone/>
+            </a:pPr>
+            <a:r>
+              <a:rPr lang="en-US" sz="2200" b="1" dirty="0">
+                <a:solidFill>
+                  <a:srgbClr val="1A1A1A"/>
+                </a:solidFill>
+                <a:latin typeface="Arial" pitchFamily="34" charset="0"/>
+                <a:ea typeface="Arial" pitchFamily="34" charset="-122"/>
+                <a:cs typeface="Arial" pitchFamily="34" charset="-120"/>
+              </a:rPr>
+              <a:t>Las cinco principales preocupaciones — y cómo responderlas.</a:t>
+            </a:r>
+            <a:endParaRPr lang="en-US" sz="2200" dirty="0"/>
+          </a:p>
+        </p:txBody>
+      </p:sp>
     </p:spTree>
   </p:cSld>
   <p:clrMapOvr>
@@ -2382,6 +2470,334 @@
           </a:p>
         </p:txBody>
       </p:sp>
+      <p:sp>
+        <p:nvSpPr>
+          <p:cNvPr id="4" name="Text 2"/>
+          <p:cNvSpPr/>
+          <p:nvPr/>
+        </p:nvSpPr>
+        <p:spPr>
+          <a:xfrm>
+            <a:off x="457200" y="868680"/>
+            <a:ext cx="10972800" cy="502920"/>
+          </a:xfrm>
+          <a:prstGeom prst="rect">
+            <a:avLst/>
+          </a:prstGeom>
+          <a:noFill/>
+          <a:ln/>
+        </p:spPr>
+        <p:txBody>
+          <a:bodyPr wrap="square" rtlCol="0" anchor="t">
+            <a:normAutofit/>
+          </a:bodyPr>
+          <a:lstStyle/>
+          <a:p>
+            <a:pPr indent="0" marL="0">
+              <a:buNone/>
+            </a:pPr>
+            <a:r>
+              <a:rPr lang="en-US" sz="2200" b="1" dirty="0">
+                <a:solidFill>
+                  <a:srgbClr val="1A1A1A"/>
+                </a:solidFill>
+                <a:latin typeface="Arial" pitchFamily="34" charset="0"/>
+                <a:ea typeface="Arial" pitchFamily="34" charset="-122"/>
+                <a:cs typeface="Arial" pitchFamily="34" charset="-120"/>
+              </a:rPr>
+              <a:t>Posicionamiento competitivo</a:t>
+            </a:r>
+            <a:endParaRPr lang="en-US" sz="2200" dirty="0"/>
+          </a:p>
+        </p:txBody>
+      </p:sp>
+      <p:sp>
+        <p:nvSpPr>
+          <p:cNvPr id="5" name="Text 3"/>
+          <p:cNvSpPr/>
+          <p:nvPr/>
+        </p:nvSpPr>
+        <p:spPr>
+          <a:xfrm>
+            <a:off x="457200" y="1481328"/>
+            <a:ext cx="10972800" cy="502920"/>
+          </a:xfrm>
+          <a:prstGeom prst="rect">
+            <a:avLst/>
+          </a:prstGeom>
+          <a:noFill/>
+          <a:ln/>
+        </p:spPr>
+        <p:txBody>
+          <a:bodyPr wrap="square" rtlCol="0" anchor="t">
+            <a:normAutofit/>
+          </a:bodyPr>
+          <a:lstStyle/>
+          <a:p>
+            <a:pPr indent="0" marL="0">
+              <a:buNone/>
+            </a:pPr>
+            <a:r>
+              <a:rPr lang="en-US" sz="2200" b="1" dirty="0">
+                <a:solidFill>
+                  <a:srgbClr val="1A1A1A"/>
+                </a:solidFill>
+                <a:latin typeface="Arial" pitchFamily="34" charset="0"/>
+                <a:ea typeface="Arial" pitchFamily="34" charset="-122"/>
+                <a:cs typeface="Arial" pitchFamily="34" charset="-120"/>
+              </a:rPr>
+              <a:t>Por qué ganamos.</a:t>
+            </a:r>
+            <a:endParaRPr lang="en-US" sz="2200" dirty="0"/>
+          </a:p>
+        </p:txBody>
+      </p:sp>
+      <p:sp>
+        <p:nvSpPr>
+          <p:cNvPr id="6" name="Text 4"/>
+          <p:cNvSpPr/>
+          <p:nvPr/>
+        </p:nvSpPr>
+        <p:spPr>
+          <a:xfrm>
+            <a:off x="457200" y="2093976"/>
+            <a:ext cx="10972800" cy="502920"/>
+          </a:xfrm>
+          <a:prstGeom prst="rect">
+            <a:avLst/>
+          </a:prstGeom>
+          <a:noFill/>
+          <a:ln/>
+        </p:spPr>
+        <p:txBody>
+          <a:bodyPr wrap="square" rtlCol="0" anchor="t">
+            <a:normAutofit/>
+          </a:bodyPr>
+          <a:lstStyle/>
+          <a:p>
+            <a:pPr indent="0" marL="0">
+              <a:buNone/>
+            </a:pPr>
+            <a:r>
+              <a:rPr lang="en-US" sz="1300" dirty="0">
+                <a:solidFill>
+                  <a:srgbClr val="4A4A4A"/>
+                </a:solidFill>
+                <a:latin typeface="Arial" pitchFamily="34" charset="0"/>
+                <a:ea typeface="Arial" pitchFamily="34" charset="-122"/>
+                <a:cs typeface="Arial" pitchFamily="34" charset="-120"/>
+              </a:rPr>
+              <a:t>Cuatro categorías. Una frase cada una. Use la fila correspondiente cuando un prospecto mencione un competidor específico.</a:t>
+            </a:r>
+            <a:endParaRPr lang="en-US" sz="1300" dirty="0"/>
+          </a:p>
+        </p:txBody>
+      </p:sp>
+      <p:sp>
+        <p:nvSpPr>
+          <p:cNvPr id="7" name="Text 5"/>
+          <p:cNvSpPr/>
+          <p:nvPr/>
+        </p:nvSpPr>
+        <p:spPr>
+          <a:xfrm>
+            <a:off x="457200" y="2734056"/>
+            <a:ext cx="10972800" cy="502920"/>
+          </a:xfrm>
+          <a:prstGeom prst="rect">
+            <a:avLst/>
+          </a:prstGeom>
+          <a:noFill/>
+          <a:ln/>
+        </p:spPr>
+        <p:txBody>
+          <a:bodyPr wrap="square" rtlCol="0" anchor="t">
+            <a:normAutofit/>
+          </a:bodyPr>
+          <a:lstStyle/>
+          <a:p>
+            <a:pPr indent="0" marL="0">
+              <a:buNone/>
+            </a:pPr>
+            <a:r>
+              <a:rPr lang="en-US" sz="1600" b="1" dirty="0">
+                <a:solidFill>
+                  <a:srgbClr val="1A1A1A"/>
+                </a:solidFill>
+                <a:latin typeface="Arial" pitchFamily="34" charset="0"/>
+                <a:ea typeface="Arial" pitchFamily="34" charset="-122"/>
+                <a:cs typeface="Arial" pitchFamily="34" charset="-120"/>
+              </a:rPr>
+              <a:t>Titular</a:t>
+            </a:r>
+            <a:endParaRPr lang="en-US" sz="1600" dirty="0"/>
+          </a:p>
+        </p:txBody>
+      </p:sp>
+      <p:sp>
+        <p:nvSpPr>
+          <p:cNvPr id="8" name="Text 6"/>
+          <p:cNvSpPr/>
+          <p:nvPr/>
+        </p:nvSpPr>
+        <p:spPr>
+          <a:xfrm>
+            <a:off x="457200" y="3346704"/>
+            <a:ext cx="10972800" cy="502920"/>
+          </a:xfrm>
+          <a:prstGeom prst="rect">
+            <a:avLst/>
+          </a:prstGeom>
+          <a:noFill/>
+          <a:ln/>
+        </p:spPr>
+        <p:txBody>
+          <a:bodyPr wrap="square" rtlCol="0" anchor="t">
+            <a:normAutofit/>
+          </a:bodyPr>
+          <a:lstStyle/>
+          <a:p>
+            <a:pPr indent="0" marL="0">
+              <a:buNone/>
+            </a:pPr>
+            <a:r>
+              <a:rPr lang="en-US" sz="1300" dirty="0">
+                <a:solidFill>
+                  <a:srgbClr val="4A4A4A"/>
+                </a:solidFill>
+                <a:latin typeface="Arial" pitchFamily="34" charset="0"/>
+                <a:ea typeface="Arial" pitchFamily="34" charset="-122"/>
+                <a:cs typeface="Arial" pitchFamily="34" charset="-120"/>
+              </a:rPr>
+              <a:t>Originalidad diseñada por humanos, transferencia total de derechos, 11 formatos. Las herramientas gratuitas suelen ofrecer originalidad limitada, derechos parciales y menos formatos.</a:t>
+            </a:r>
+            <a:endParaRPr lang="en-US" sz="1300" dirty="0"/>
+          </a:p>
+        </p:txBody>
+      </p:sp>
+      <p:sp>
+        <p:nvSpPr>
+          <p:cNvPr id="9" name="Text 7"/>
+          <p:cNvSpPr/>
+          <p:nvPr/>
+        </p:nvSpPr>
+        <p:spPr>
+          <a:xfrm>
+            <a:off x="457200" y="3986784"/>
+            <a:ext cx="10972800" cy="502920"/>
+          </a:xfrm>
+          <a:prstGeom prst="rect">
+            <a:avLst/>
+          </a:prstGeom>
+          <a:noFill/>
+          <a:ln/>
+        </p:spPr>
+        <p:txBody>
+          <a:bodyPr wrap="square" rtlCol="0" anchor="t">
+            <a:normAutofit/>
+          </a:bodyPr>
+          <a:lstStyle/>
+          <a:p>
+            <a:pPr indent="0" marL="0">
+              <a:buNone/>
+            </a:pPr>
+            <a:r>
+              <a:rPr lang="en-US" sz="1300" dirty="0">
+                <a:solidFill>
+                  <a:srgbClr val="4A4A4A"/>
+                </a:solidFill>
+                <a:latin typeface="Arial" pitchFamily="34" charset="0"/>
+                <a:ea typeface="Arial" pitchFamily="34" charset="-122"/>
+                <a:cs typeface="Arial" pitchFamily="34" charset="-120"/>
+              </a:rPr>
+              <a:t>Un coordinador dedicado y un equipo interno que ha entregado más de 75.000 logotipos — no un desconocido haciendo malabares con treinta proyectos. Tiempos predecibles.</a:t>
+            </a:r>
+            <a:endParaRPr lang="en-US" sz="1300" dirty="0"/>
+          </a:p>
+        </p:txBody>
+      </p:sp>
+      <p:sp>
+        <p:nvSpPr>
+          <p:cNvPr id="10" name="Text 8"/>
+          <p:cNvSpPr/>
+          <p:nvPr/>
+        </p:nvSpPr>
+        <p:spPr>
+          <a:xfrm>
+            <a:off x="457200" y="4626864"/>
+            <a:ext cx="10972800" cy="502920"/>
+          </a:xfrm>
+          <a:prstGeom prst="rect">
+            <a:avLst/>
+          </a:prstGeom>
+          <a:noFill/>
+          <a:ln/>
+        </p:spPr>
+        <p:txBody>
+          <a:bodyPr wrap="square" rtlCol="0" anchor="t">
+            <a:normAutofit/>
+          </a:bodyPr>
+          <a:lstStyle/>
+          <a:p>
+            <a:pPr indent="0" marL="0">
+              <a:buNone/>
+            </a:pPr>
+            <a:r>
+              <a:rPr lang="en-US" sz="1300" dirty="0">
+                <a:solidFill>
+                  <a:srgbClr val="4A4A4A"/>
+                </a:solidFill>
+                <a:latin typeface="Arial" pitchFamily="34" charset="0"/>
+                <a:ea typeface="Arial" pitchFamily="34" charset="-122"/>
+                <a:cs typeface="Arial" pitchFamily="34" charset="-120"/>
+              </a:rPr>
+              <a:t>Calidad comparable a una fracción del costo, con alcance y cronograma definidos. Sin facturas sorpresa, sin contratos de seis meses.</a:t>
+            </a:r>
+            <a:endParaRPr lang="en-US" sz="1300" dirty="0"/>
+          </a:p>
+        </p:txBody>
+      </p:sp>
+      <p:sp>
+        <p:nvSpPr>
+          <p:cNvPr id="11" name="Text 9"/>
+          <p:cNvSpPr/>
+          <p:nvPr/>
+        </p:nvSpPr>
+        <p:spPr>
+          <a:xfrm>
+            <a:off x="457200" y="5266944"/>
+            <a:ext cx="10972800" cy="502920"/>
+          </a:xfrm>
+          <a:prstGeom prst="rect">
+            <a:avLst/>
+          </a:prstGeom>
+          <a:noFill/>
+          <a:ln/>
+        </p:spPr>
+        <p:txBody>
+          <a:bodyPr wrap="square" rtlCol="0" anchor="t">
+            <a:normAutofit/>
+          </a:bodyPr>
+          <a:lstStyle/>
+          <a:p>
+            <a:pPr indent="0" marL="0">
+              <a:buNone/>
+            </a:pPr>
+            <a:r>
+              <a:rPr lang="en-US" sz="1300" dirty="0">
+                <a:solidFill>
+                  <a:srgbClr val="4A4A4A"/>
+                </a:solidFill>
+                <a:latin typeface="Arial" pitchFamily="34" charset="0"/>
+                <a:ea typeface="Arial" pitchFamily="34" charset="-122"/>
+                <a:cs typeface="Arial" pitchFamily="34" charset="-120"/>
+              </a:rPr>
+              <a:t>El 20% de los logotipos de 2025 son generados por IA — cada vez se parecen más. Las marcas diseñadas por humanos siguen siendo más diferenciadas y más defendibles como marcas registradas.</a:t>
+            </a:r>
+            <a:endParaRPr lang="en-US" sz="1300" dirty="0"/>
+          </a:p>
+        </p:txBody>
+      </p:sp>
     </p:spTree>
   </p:cSld>
   <p:clrMapOvr>
@@ -2492,6 +2908,375 @@
           </a:p>
         </p:txBody>
       </p:sp>
+      <p:sp>
+        <p:nvSpPr>
+          <p:cNvPr id="4" name="Text 2"/>
+          <p:cNvSpPr/>
+          <p:nvPr/>
+        </p:nvSpPr>
+        <p:spPr>
+          <a:xfrm>
+            <a:off x="457200" y="868680"/>
+            <a:ext cx="10972800" cy="502920"/>
+          </a:xfrm>
+          <a:prstGeom prst="rect">
+            <a:avLst/>
+          </a:prstGeom>
+          <a:noFill/>
+          <a:ln/>
+        </p:spPr>
+        <p:txBody>
+          <a:bodyPr wrap="square" rtlCol="0" anchor="t">
+            <a:normAutofit/>
+          </a:bodyPr>
+          <a:lstStyle/>
+          <a:p>
+            <a:pPr indent="0" marL="0">
+              <a:buNone/>
+            </a:pPr>
+            <a:r>
+              <a:rPr lang="en-US" sz="2200" b="1" dirty="0">
+                <a:solidFill>
+                  <a:srgbClr val="1A1A1A"/>
+                </a:solidFill>
+                <a:latin typeface="Arial" pitchFamily="34" charset="0"/>
+                <a:ea typeface="Arial" pitchFamily="34" charset="-122"/>
+                <a:cs typeface="Arial" pitchFamily="34" charset="-120"/>
+              </a:rPr>
+              <a:t>Preguntas frecuentes</a:t>
+            </a:r>
+            <a:endParaRPr lang="en-US" sz="2200" dirty="0"/>
+          </a:p>
+        </p:txBody>
+      </p:sp>
+      <p:sp>
+        <p:nvSpPr>
+          <p:cNvPr id="5" name="Text 3"/>
+          <p:cNvSpPr/>
+          <p:nvPr/>
+        </p:nvSpPr>
+        <p:spPr>
+          <a:xfrm>
+            <a:off x="457200" y="1481328"/>
+            <a:ext cx="10972800" cy="502920"/>
+          </a:xfrm>
+          <a:prstGeom prst="rect">
+            <a:avLst/>
+          </a:prstGeom>
+          <a:noFill/>
+          <a:ln/>
+        </p:spPr>
+        <p:txBody>
+          <a:bodyPr wrap="square" rtlCol="0" anchor="t">
+            <a:normAutofit/>
+          </a:bodyPr>
+          <a:lstStyle/>
+          <a:p>
+            <a:pPr indent="0" marL="0">
+              <a:buNone/>
+            </a:pPr>
+            <a:r>
+              <a:rPr lang="en-US" sz="2200" b="1" dirty="0">
+                <a:solidFill>
+                  <a:srgbClr val="1A1A1A"/>
+                </a:solidFill>
+                <a:latin typeface="Arial" pitchFamily="34" charset="0"/>
+                <a:ea typeface="Arial" pitchFamily="34" charset="-122"/>
+                <a:cs typeface="Arial" pitchFamily="34" charset="-120"/>
+              </a:rPr>
+              <a:t>Las preguntas más frecuentes de los clientes.</a:t>
+            </a:r>
+            <a:endParaRPr lang="en-US" sz="2200" dirty="0"/>
+          </a:p>
+        </p:txBody>
+      </p:sp>
+      <p:sp>
+        <p:nvSpPr>
+          <p:cNvPr id="6" name="Text 4"/>
+          <p:cNvSpPr/>
+          <p:nvPr/>
+        </p:nvSpPr>
+        <p:spPr>
+          <a:xfrm>
+            <a:off x="457200" y="2093976"/>
+            <a:ext cx="10972800" cy="502920"/>
+          </a:xfrm>
+          <a:prstGeom prst="rect">
+            <a:avLst/>
+          </a:prstGeom>
+          <a:noFill/>
+          <a:ln/>
+        </p:spPr>
+        <p:txBody>
+          <a:bodyPr wrap="square" rtlCol="0" anchor="t">
+            <a:normAutofit/>
+          </a:bodyPr>
+          <a:lstStyle/>
+          <a:p>
+            <a:pPr indent="0" marL="0">
+              <a:buNone/>
+            </a:pPr>
+            <a:r>
+              <a:rPr lang="en-US" sz="1600" b="1" dirty="0">
+                <a:solidFill>
+                  <a:srgbClr val="1A1A1A"/>
+                </a:solidFill>
+                <a:latin typeface="Arial" pitchFamily="34" charset="0"/>
+                <a:ea typeface="Arial" pitchFamily="34" charset="-122"/>
+                <a:cs typeface="Arial" pitchFamily="34" charset="-120"/>
+              </a:rPr>
+              <a:t>¿Cuántas revisiones se incluyen?</a:t>
+            </a:r>
+            <a:endParaRPr lang="en-US" sz="1600" dirty="0"/>
+          </a:p>
+        </p:txBody>
+      </p:sp>
+      <p:sp>
+        <p:nvSpPr>
+          <p:cNvPr id="7" name="Text 5"/>
+          <p:cNvSpPr/>
+          <p:nvPr/>
+        </p:nvSpPr>
+        <p:spPr>
+          <a:xfrm>
+            <a:off x="457200" y="2706624"/>
+            <a:ext cx="10972800" cy="502920"/>
+          </a:xfrm>
+          <a:prstGeom prst="rect">
+            <a:avLst/>
+          </a:prstGeom>
+          <a:noFill/>
+          <a:ln/>
+        </p:spPr>
+        <p:txBody>
+          <a:bodyPr wrap="square" rtlCol="0" anchor="t">
+            <a:normAutofit/>
+          </a:bodyPr>
+          <a:lstStyle/>
+          <a:p>
+            <a:pPr indent="0" marL="0">
+              <a:buNone/>
+            </a:pPr>
+            <a:r>
+              <a:rPr lang="en-US" sz="1300" dirty="0">
+                <a:solidFill>
+                  <a:srgbClr val="4A4A4A"/>
+                </a:solidFill>
+                <a:latin typeface="Arial" pitchFamily="34" charset="0"/>
+                <a:ea typeface="Arial" pitchFamily="34" charset="-122"/>
+                <a:cs typeface="Arial" pitchFamily="34" charset="-120"/>
+              </a:rPr>
+              <a:t>Hasta tres rondas en cada plan. Revisiones adicionales disponibles por un cargo adicional.</a:t>
+            </a:r>
+            <a:endParaRPr lang="en-US" sz="1300" dirty="0"/>
+          </a:p>
+        </p:txBody>
+      </p:sp>
+      <p:sp>
+        <p:nvSpPr>
+          <p:cNvPr id="8" name="Text 6"/>
+          <p:cNvSpPr/>
+          <p:nvPr/>
+        </p:nvSpPr>
+        <p:spPr>
+          <a:xfrm>
+            <a:off x="457200" y="3346704"/>
+            <a:ext cx="10972800" cy="502920"/>
+          </a:xfrm>
+          <a:prstGeom prst="rect">
+            <a:avLst/>
+          </a:prstGeom>
+          <a:noFill/>
+          <a:ln/>
+        </p:spPr>
+        <p:txBody>
+          <a:bodyPr wrap="square" rtlCol="0" anchor="t">
+            <a:normAutofit/>
+          </a:bodyPr>
+          <a:lstStyle/>
+          <a:p>
+            <a:pPr indent="0" marL="0">
+              <a:buNone/>
+            </a:pPr>
+            <a:r>
+              <a:rPr lang="en-US" sz="1600" b="1" dirty="0">
+                <a:solidFill>
+                  <a:srgbClr val="1A1A1A"/>
+                </a:solidFill>
+                <a:latin typeface="Arial" pitchFamily="34" charset="0"/>
+                <a:ea typeface="Arial" pitchFamily="34" charset="-122"/>
+                <a:cs typeface="Arial" pitchFamily="34" charset="-120"/>
+              </a:rPr>
+              <a:t>¿Cuánto tiempo toma?</a:t>
+            </a:r>
+            <a:endParaRPr lang="en-US" sz="1600" dirty="0"/>
+          </a:p>
+        </p:txBody>
+      </p:sp>
+      <p:sp>
+        <p:nvSpPr>
+          <p:cNvPr id="9" name="Text 7"/>
+          <p:cNvSpPr/>
+          <p:nvPr/>
+        </p:nvSpPr>
+        <p:spPr>
+          <a:xfrm>
+            <a:off x="457200" y="3959352"/>
+            <a:ext cx="10972800" cy="502920"/>
+          </a:xfrm>
+          <a:prstGeom prst="rect">
+            <a:avLst/>
+          </a:prstGeom>
+          <a:noFill/>
+          <a:ln/>
+        </p:spPr>
+        <p:txBody>
+          <a:bodyPr wrap="square" rtlCol="0" anchor="t">
+            <a:normAutofit/>
+          </a:bodyPr>
+          <a:lstStyle/>
+          <a:p>
+            <a:pPr indent="0" marL="0">
+              <a:buNone/>
+            </a:pPr>
+            <a:r>
+              <a:rPr lang="en-US" sz="1300" dirty="0">
+                <a:solidFill>
+                  <a:srgbClr val="4A4A4A"/>
+                </a:solidFill>
+                <a:latin typeface="Arial" pitchFamily="34" charset="0"/>
+                <a:ea typeface="Arial" pitchFamily="34" charset="-122"/>
+                <a:cs typeface="Arial" pitchFamily="34" charset="-120"/>
+              </a:rPr>
+              <a:t>Los conceptos llegan en tres a cinco días hábiles. Los proyectos completos suelen finalizar en dos a tres semanas.</a:t>
+            </a:r>
+            <a:endParaRPr lang="en-US" sz="1300" dirty="0"/>
+          </a:p>
+        </p:txBody>
+      </p:sp>
+      <p:sp>
+        <p:nvSpPr>
+          <p:cNvPr id="10" name="Text 8"/>
+          <p:cNvSpPr/>
+          <p:nvPr/>
+        </p:nvSpPr>
+        <p:spPr>
+          <a:xfrm>
+            <a:off x="457200" y="4599432"/>
+            <a:ext cx="10972800" cy="502920"/>
+          </a:xfrm>
+          <a:prstGeom prst="rect">
+            <a:avLst/>
+          </a:prstGeom>
+          <a:noFill/>
+          <a:ln/>
+        </p:spPr>
+        <p:txBody>
+          <a:bodyPr wrap="square" rtlCol="0" anchor="t">
+            <a:normAutofit/>
+          </a:bodyPr>
+          <a:lstStyle/>
+          <a:p>
+            <a:pPr indent="0" marL="0">
+              <a:buNone/>
+            </a:pPr>
+            <a:r>
+              <a:rPr lang="en-US" sz="1600" b="1" dirty="0">
+                <a:solidFill>
+                  <a:srgbClr val="1A1A1A"/>
+                </a:solidFill>
+                <a:latin typeface="Arial" pitchFamily="34" charset="0"/>
+                <a:ea typeface="Arial" pitchFamily="34" charset="-122"/>
+                <a:cs typeface="Arial" pitchFamily="34" charset="-120"/>
+              </a:rPr>
+              <a:t>¿Qué formatos de archivo recibo?</a:t>
+            </a:r>
+            <a:endParaRPr lang="en-US" sz="1600" dirty="0"/>
+          </a:p>
+        </p:txBody>
+      </p:sp>
+      <p:sp>
+        <p:nvSpPr>
+          <p:cNvPr id="11" name="Text 9"/>
+          <p:cNvSpPr/>
+          <p:nvPr/>
+        </p:nvSpPr>
+        <p:spPr>
+          <a:xfrm>
+            <a:off x="457200" y="5212080"/>
+            <a:ext cx="10972800" cy="502920"/>
+          </a:xfrm>
+          <a:prstGeom prst="rect">
+            <a:avLst/>
+          </a:prstGeom>
+          <a:noFill/>
+          <a:ln/>
+        </p:spPr>
+        <p:txBody>
+          <a:bodyPr wrap="square" rtlCol="0" anchor="t">
+            <a:normAutofit/>
+          </a:bodyPr>
+          <a:lstStyle/>
+          <a:p>
+            <a:pPr indent="0" marL="0">
+              <a:buNone/>
+            </a:pPr>
+            <a:r>
+              <a:rPr lang="en-US" sz="1300" dirty="0">
+                <a:solidFill>
+                  <a:srgbClr val="4A4A4A"/>
+                </a:solidFill>
+                <a:latin typeface="Arial" pitchFamily="34" charset="0"/>
+                <a:ea typeface="Arial" pitchFamily="34" charset="-122"/>
+                <a:cs typeface="Arial" pitchFamily="34" charset="-120"/>
+              </a:rPr>
+              <a:t>Once formatos — AI, EPS, PDF, JPG, PNG, GIF e ICO. Seis en color, cinco en blanco y negro.</a:t>
+            </a:r>
+            <a:endParaRPr lang="en-US" sz="1300" dirty="0"/>
+          </a:p>
+        </p:txBody>
+      </p:sp>
+      <p:sp>
+        <p:nvSpPr>
+          <p:cNvPr id="12" name="Text 10"/>
+          <p:cNvSpPr/>
+          <p:nvPr/>
+        </p:nvSpPr>
+        <p:spPr>
+          <a:xfrm>
+            <a:off x="457200" y="5852160"/>
+            <a:ext cx="10972800" cy="502920"/>
+          </a:xfrm>
+          <a:prstGeom prst="rect">
+            <a:avLst/>
+          </a:prstGeom>
+          <a:noFill/>
+          <a:ln/>
+        </p:spPr>
+        <p:txBody>
+          <a:bodyPr wrap="square" rtlCol="0" anchor="t">
+            <a:normAutofit/>
+          </a:bodyPr>
+          <a:lstStyle/>
+          <a:p>
+            <a:pPr indent="0" marL="0">
+              <a:buNone/>
+            </a:pPr>
+            <a:r>
+              <a:rPr lang="en-US" sz="1600" b="1" dirty="0">
+                <a:solidFill>
+                  <a:srgbClr val="1A1A1A"/>
+                </a:solidFill>
+                <a:latin typeface="Arial" pitchFamily="34" charset="0"/>
+                <a:ea typeface="Arial" pitchFamily="34" charset="-122"/>
+                <a:cs typeface="Arial" pitchFamily="34" charset="-120"/>
+              </a:rPr>
+              <a:t>¿Quién es dueño del logotipo terminado?</a:t>
+            </a:r>
+            <a:endParaRPr lang="en-US" sz="1600" dirty="0"/>
+          </a:p>
+        </p:txBody>
+      </p:sp>
     </p:spTree>
   </p:cSld>
   <p:clrMapOvr>
@@ -2602,6 +3387,129 @@
           </a:p>
         </p:txBody>
       </p:sp>
+      <p:sp>
+        <p:nvSpPr>
+          <p:cNvPr id="4" name="Text 2"/>
+          <p:cNvSpPr/>
+          <p:nvPr/>
+        </p:nvSpPr>
+        <p:spPr>
+          <a:xfrm>
+            <a:off x="457200" y="868680"/>
+            <a:ext cx="10972800" cy="502920"/>
+          </a:xfrm>
+          <a:prstGeom prst="rect">
+            <a:avLst/>
+          </a:prstGeom>
+          <a:noFill/>
+          <a:ln/>
+        </p:spPr>
+        <p:txBody>
+          <a:bodyPr wrap="square" rtlCol="0" anchor="t">
+            <a:normAutofit/>
+          </a:bodyPr>
+          <a:lstStyle/>
+          <a:p>
+            <a:pPr indent="0" marL="0">
+              <a:buNone/>
+            </a:pPr>
+            <a:r>
+              <a:rPr lang="en-US" sz="2800" b="1" dirty="0">
+                <a:solidFill>
+                  <a:srgbClr val="1A1A1A"/>
+                </a:solidFill>
+                <a:latin typeface="Arial" pitchFamily="34" charset="0"/>
+                <a:ea typeface="Arial" pitchFamily="34" charset="-122"/>
+                <a:cs typeface="Arial" pitchFamily="34" charset="-120"/>
+              </a:rPr>
+              <a:t>Comencemos</a:t>
+            </a:r>
+            <a:endParaRPr lang="en-US" sz="2800" dirty="0"/>
+          </a:p>
+        </p:txBody>
+      </p:sp>
+      <p:sp>
+        <p:nvSpPr>
+          <p:cNvPr id="5" name="Text 3"/>
+          <p:cNvSpPr/>
+          <p:nvPr/>
+        </p:nvSpPr>
+        <p:spPr>
+          <a:xfrm>
+            <a:off x="457200" y="1481328"/>
+            <a:ext cx="10972800" cy="502920"/>
+          </a:xfrm>
+          <a:prstGeom prst="rect">
+            <a:avLst/>
+          </a:prstGeom>
+          <a:noFill/>
+          <a:ln/>
+        </p:spPr>
+        <p:txBody>
+          <a:bodyPr wrap="square" rtlCol="0" anchor="t">
+            <a:normAutofit/>
+          </a:bodyPr>
+          <a:lstStyle/>
+          <a:p>
+            <a:pPr indent="0" marL="0">
+              <a:buNone/>
+            </a:pPr>
+            <a:r>
+              <a:rPr lang="en-US" sz="1300" dirty="0">
+                <a:solidFill>
+                  <a:srgbClr val="4A4A4A"/>
+                </a:solidFill>
+                <a:latin typeface="Arial" pitchFamily="34" charset="0"/>
+                <a:ea typeface="Arial" pitchFamily="34" charset="-122"/>
+                <a:cs typeface="Arial" pitchFamily="34" charset="-120"/>
+              </a:rPr>
+              <a:t>¿Tiene preguntas, desea programar una demostración o explorar cómo estas soluciones pueden apoyar a sus equipos de ventas hoy?</a:t>
+            </a:r>
+            <a:endParaRPr lang="en-US" sz="1300" dirty="0"/>
+          </a:p>
+        </p:txBody>
+      </p:sp>
+      <p:sp>
+        <p:nvSpPr>
+          <p:cNvPr id="6" name="Text 4"/>
+          <p:cNvSpPr/>
+          <p:nvPr/>
+        </p:nvSpPr>
+        <p:spPr>
+          <a:xfrm>
+            <a:off x="457200" y="2121408"/>
+            <a:ext cx="10972800" cy="502920"/>
+          </a:xfrm>
+          <a:prstGeom prst="rect">
+            <a:avLst/>
+          </a:prstGeom>
+          <a:noFill/>
+          <a:ln/>
+        </p:spPr>
+        <p:txBody>
+          <a:bodyPr wrap="square" rtlCol="0" anchor="t">
+            <a:normAutofit/>
+          </a:bodyPr>
+          <a:lstStyle/>
+          <a:p>
+            <a:pPr indent="0" marL="0">
+              <a:buNone/>
+            </a:pPr>
+            <a:r>
+              <a:rPr lang="en-US" sz="1300" dirty="0">
+                <a:solidFill>
+                  <a:srgbClr val="4A4A4A"/>
+                </a:solidFill>
+                <a:latin typeface="Arial" pitchFamily="34" charset="0"/>
+                <a:ea typeface="Arial" pitchFamily="34" charset="-122"/>
+                <a:cs typeface="Arial" pitchFamily="34" charset="-120"/>
+              </a:rPr>
+              <a:t>Contáctenos en marketing@hostopia.com para obtener más información y conectar con uno de nuestros expertos.</a:t>
+            </a:r>
+            <a:endParaRPr lang="en-US" sz="1300" dirty="0"/>
+          </a:p>
+        </p:txBody>
+      </p:sp>
     </p:spTree>
   </p:cSld>
   <p:clrMapOvr>
@@ -2712,6 +3620,375 @@
           </a:p>
         </p:txBody>
       </p:sp>
+      <p:sp>
+        <p:nvSpPr>
+          <p:cNvPr id="4" name="Text 2"/>
+          <p:cNvSpPr/>
+          <p:nvPr/>
+        </p:nvSpPr>
+        <p:spPr>
+          <a:xfrm>
+            <a:off x="457200" y="868680"/>
+            <a:ext cx="10972800" cy="502920"/>
+          </a:xfrm>
+          <a:prstGeom prst="rect">
+            <a:avLst/>
+          </a:prstGeom>
+          <a:noFill/>
+          <a:ln/>
+        </p:spPr>
+        <p:txBody>
+          <a:bodyPr wrap="square" rtlCol="0" anchor="t">
+            <a:normAutofit/>
+          </a:bodyPr>
+          <a:lstStyle/>
+          <a:p>
+            <a:pPr indent="0" marL="0">
+              <a:buNone/>
+            </a:pPr>
+            <a:r>
+              <a:rPr lang="en-US" sz="2200" b="1" dirty="0">
+                <a:solidFill>
+                  <a:srgbClr val="1A1A1A"/>
+                </a:solidFill>
+                <a:latin typeface="Arial" pitchFamily="34" charset="0"/>
+                <a:ea typeface="Arial" pitchFamily="34" charset="-122"/>
+                <a:cs typeface="Arial" pitchFamily="34" charset="-120"/>
+              </a:rPr>
+              <a:t>Lo que cubriremos.</a:t>
+            </a:r>
+            <a:endParaRPr lang="en-US" sz="2200" dirty="0"/>
+          </a:p>
+        </p:txBody>
+      </p:sp>
+      <p:sp>
+        <p:nvSpPr>
+          <p:cNvPr id="5" name="Text 3"/>
+          <p:cNvSpPr/>
+          <p:nvPr/>
+        </p:nvSpPr>
+        <p:spPr>
+          <a:xfrm>
+            <a:off x="457200" y="1481328"/>
+            <a:ext cx="10972800" cy="502920"/>
+          </a:xfrm>
+          <a:prstGeom prst="rect">
+            <a:avLst/>
+          </a:prstGeom>
+          <a:noFill/>
+          <a:ln/>
+        </p:spPr>
+        <p:txBody>
+          <a:bodyPr wrap="square" rtlCol="0" anchor="t">
+            <a:normAutofit/>
+          </a:bodyPr>
+          <a:lstStyle/>
+          <a:p>
+            <a:pPr indent="0" marL="0">
+              <a:buNone/>
+            </a:pPr>
+            <a:r>
+              <a:rPr lang="en-US" sz="1300" dirty="0">
+                <a:solidFill>
+                  <a:srgbClr val="4A4A4A"/>
+                </a:solidFill>
+                <a:latin typeface="Arial" pitchFamily="34" charset="0"/>
+                <a:ea typeface="Arial" pitchFamily="34" charset="-122"/>
+                <a:cs typeface="Arial" pitchFamily="34" charset="-120"/>
+              </a:rPr>
+              <a:t>Veinticinco minutos, cinco secciones. La mayor parte del valor está en la sección cinco.</a:t>
+            </a:r>
+            <a:endParaRPr lang="en-US" sz="1300" dirty="0"/>
+          </a:p>
+        </p:txBody>
+      </p:sp>
+      <p:sp>
+        <p:nvSpPr>
+          <p:cNvPr id="6" name="Text 4"/>
+          <p:cNvSpPr/>
+          <p:nvPr/>
+        </p:nvSpPr>
+        <p:spPr>
+          <a:xfrm>
+            <a:off x="457200" y="2121408"/>
+            <a:ext cx="10972800" cy="502920"/>
+          </a:xfrm>
+          <a:prstGeom prst="rect">
+            <a:avLst/>
+          </a:prstGeom>
+          <a:noFill/>
+          <a:ln/>
+        </p:spPr>
+        <p:txBody>
+          <a:bodyPr wrap="square" rtlCol="0" anchor="t">
+            <a:normAutofit/>
+          </a:bodyPr>
+          <a:lstStyle/>
+          <a:p>
+            <a:pPr indent="0" marL="0">
+              <a:buNone/>
+            </a:pPr>
+            <a:r>
+              <a:rPr lang="en-US" sz="1600" b="1" dirty="0">
+                <a:solidFill>
+                  <a:srgbClr val="1A1A1A"/>
+                </a:solidFill>
+                <a:latin typeface="Arial" pitchFamily="34" charset="0"/>
+                <a:ea typeface="Arial" pitchFamily="34" charset="-122"/>
+                <a:cs typeface="Arial" pitchFamily="34" charset="-120"/>
+              </a:rPr>
+              <a:t>Por qué importan los logotipos hoy</a:t>
+            </a:r>
+            <a:endParaRPr lang="en-US" sz="1600" dirty="0"/>
+          </a:p>
+        </p:txBody>
+      </p:sp>
+      <p:sp>
+        <p:nvSpPr>
+          <p:cNvPr id="7" name="Text 5"/>
+          <p:cNvSpPr/>
+          <p:nvPr/>
+        </p:nvSpPr>
+        <p:spPr>
+          <a:xfrm>
+            <a:off x="457200" y="2734056"/>
+            <a:ext cx="10972800" cy="502920"/>
+          </a:xfrm>
+          <a:prstGeom prst="rect">
+            <a:avLst/>
+          </a:prstGeom>
+          <a:noFill/>
+          <a:ln/>
+        </p:spPr>
+        <p:txBody>
+          <a:bodyPr wrap="square" rtlCol="0" anchor="t">
+            <a:normAutofit/>
+          </a:bodyPr>
+          <a:lstStyle/>
+          <a:p>
+            <a:pPr indent="0" marL="0">
+              <a:buNone/>
+            </a:pPr>
+            <a:r>
+              <a:rPr lang="en-US" sz="1300" dirty="0">
+                <a:solidFill>
+                  <a:srgbClr val="4A4A4A"/>
+                </a:solidFill>
+                <a:latin typeface="Arial" pitchFamily="34" charset="0"/>
+                <a:ea typeface="Arial" pitchFamily="34" charset="-122"/>
+                <a:cs typeface="Arial" pitchFamily="34" charset="-120"/>
+              </a:rPr>
+              <a:t>Datos 2025 sobre primeras impresiones y confianza de marca.</a:t>
+            </a:r>
+            <a:endParaRPr lang="en-US" sz="1300" dirty="0"/>
+          </a:p>
+        </p:txBody>
+      </p:sp>
+      <p:sp>
+        <p:nvSpPr>
+          <p:cNvPr id="8" name="Text 6"/>
+          <p:cNvSpPr/>
+          <p:nvPr/>
+        </p:nvSpPr>
+        <p:spPr>
+          <a:xfrm>
+            <a:off x="457200" y="3374136"/>
+            <a:ext cx="10972800" cy="502920"/>
+          </a:xfrm>
+          <a:prstGeom prst="rect">
+            <a:avLst/>
+          </a:prstGeom>
+          <a:noFill/>
+          <a:ln/>
+        </p:spPr>
+        <p:txBody>
+          <a:bodyPr wrap="square" rtlCol="0" anchor="t">
+            <a:normAutofit/>
+          </a:bodyPr>
+          <a:lstStyle/>
+          <a:p>
+            <a:pPr indent="0" marL="0">
+              <a:buNone/>
+            </a:pPr>
+            <a:r>
+              <a:rPr lang="en-US" sz="1600" b="1" dirty="0">
+                <a:solidFill>
+                  <a:srgbClr val="1A1A1A"/>
+                </a:solidFill>
+                <a:latin typeface="Arial" pitchFamily="34" charset="0"/>
+                <a:ea typeface="Arial" pitchFamily="34" charset="-122"/>
+                <a:cs typeface="Arial" pitchFamily="34" charset="-120"/>
+              </a:rPr>
+              <a:t>El producto</a:t>
+            </a:r>
+            <a:endParaRPr lang="en-US" sz="1600" dirty="0"/>
+          </a:p>
+        </p:txBody>
+      </p:sp>
+      <p:sp>
+        <p:nvSpPr>
+          <p:cNvPr id="9" name="Text 7"/>
+          <p:cNvSpPr/>
+          <p:nvPr/>
+        </p:nvSpPr>
+        <p:spPr>
+          <a:xfrm>
+            <a:off x="457200" y="3986784"/>
+            <a:ext cx="10972800" cy="502920"/>
+          </a:xfrm>
+          <a:prstGeom prst="rect">
+            <a:avLst/>
+          </a:prstGeom>
+          <a:noFill/>
+          <a:ln/>
+        </p:spPr>
+        <p:txBody>
+          <a:bodyPr wrap="square" rtlCol="0" anchor="t">
+            <a:normAutofit/>
+          </a:bodyPr>
+          <a:lstStyle/>
+          <a:p>
+            <a:pPr indent="0" marL="0">
+              <a:buNone/>
+            </a:pPr>
+            <a:r>
+              <a:rPr lang="en-US" sz="1300" dirty="0">
+                <a:solidFill>
+                  <a:srgbClr val="4A4A4A"/>
+                </a:solidFill>
+                <a:latin typeface="Arial" pitchFamily="34" charset="0"/>
+                <a:ea typeface="Arial" pitchFamily="34" charset="-122"/>
+                <a:cs typeface="Arial" pitchFamily="34" charset="-120"/>
+              </a:rPr>
+              <a:t>Qué es, para quién es y qué incluye.</a:t>
+            </a:r>
+            <a:endParaRPr lang="en-US" sz="1300" dirty="0"/>
+          </a:p>
+        </p:txBody>
+      </p:sp>
+      <p:sp>
+        <p:nvSpPr>
+          <p:cNvPr id="10" name="Text 8"/>
+          <p:cNvSpPr/>
+          <p:nvPr/>
+        </p:nvSpPr>
+        <p:spPr>
+          <a:xfrm>
+            <a:off x="457200" y="4626864"/>
+            <a:ext cx="10972800" cy="502920"/>
+          </a:xfrm>
+          <a:prstGeom prst="rect">
+            <a:avLst/>
+          </a:prstGeom>
+          <a:noFill/>
+          <a:ln/>
+        </p:spPr>
+        <p:txBody>
+          <a:bodyPr wrap="square" rtlCol="0" anchor="t">
+            <a:normAutofit/>
+          </a:bodyPr>
+          <a:lstStyle/>
+          <a:p>
+            <a:pPr indent="0" marL="0">
+              <a:buNone/>
+            </a:pPr>
+            <a:r>
+              <a:rPr lang="en-US" sz="1600" b="1" dirty="0">
+                <a:solidFill>
+                  <a:srgbClr val="1A1A1A"/>
+                </a:solidFill>
+                <a:latin typeface="Arial" pitchFamily="34" charset="0"/>
+                <a:ea typeface="Arial" pitchFamily="34" charset="-122"/>
+                <a:cs typeface="Arial" pitchFamily="34" charset="-120"/>
+              </a:rPr>
+              <a:t>El proceso creativo</a:t>
+            </a:r>
+            <a:endParaRPr lang="en-US" sz="1600" dirty="0"/>
+          </a:p>
+        </p:txBody>
+      </p:sp>
+      <p:sp>
+        <p:nvSpPr>
+          <p:cNvPr id="11" name="Text 9"/>
+          <p:cNvSpPr/>
+          <p:nvPr/>
+        </p:nvSpPr>
+        <p:spPr>
+          <a:xfrm>
+            <a:off x="457200" y="5239512"/>
+            <a:ext cx="10972800" cy="502920"/>
+          </a:xfrm>
+          <a:prstGeom prst="rect">
+            <a:avLst/>
+          </a:prstGeom>
+          <a:noFill/>
+          <a:ln/>
+        </p:spPr>
+        <p:txBody>
+          <a:bodyPr wrap="square" rtlCol="0" anchor="t">
+            <a:normAutofit/>
+          </a:bodyPr>
+          <a:lstStyle/>
+          <a:p>
+            <a:pPr indent="0" marL="0">
+              <a:buNone/>
+            </a:pPr>
+            <a:r>
+              <a:rPr lang="en-US" sz="1300" dirty="0">
+                <a:solidFill>
+                  <a:srgbClr val="4A4A4A"/>
+                </a:solidFill>
+                <a:latin typeface="Arial" pitchFamily="34" charset="0"/>
+                <a:ea typeface="Arial" pitchFamily="34" charset="-122"/>
+                <a:cs typeface="Arial" pitchFamily="34" charset="-120"/>
+              </a:rPr>
+              <a:t>Del brief a los archivos finales en 2–3 semanas.</a:t>
+            </a:r>
+            <a:endParaRPr lang="en-US" sz="1300" dirty="0"/>
+          </a:p>
+        </p:txBody>
+      </p:sp>
+      <p:sp>
+        <p:nvSpPr>
+          <p:cNvPr id="12" name="Text 10"/>
+          <p:cNvSpPr/>
+          <p:nvPr/>
+        </p:nvSpPr>
+        <p:spPr>
+          <a:xfrm>
+            <a:off x="457200" y="5879592"/>
+            <a:ext cx="10972800" cy="502920"/>
+          </a:xfrm>
+          <a:prstGeom prst="rect">
+            <a:avLst/>
+          </a:prstGeom>
+          <a:noFill/>
+          <a:ln/>
+        </p:spPr>
+        <p:txBody>
+          <a:bodyPr wrap="square" rtlCol="0" anchor="t">
+            <a:normAutofit/>
+          </a:bodyPr>
+          <a:lstStyle/>
+          <a:p>
+            <a:pPr indent="0" marL="0">
+              <a:buNone/>
+            </a:pPr>
+            <a:r>
+              <a:rPr lang="en-US" sz="1600" b="1" dirty="0">
+                <a:solidFill>
+                  <a:srgbClr val="1A1A1A"/>
+                </a:solidFill>
+                <a:latin typeface="Arial" pitchFamily="34" charset="0"/>
+                <a:ea typeface="Arial" pitchFamily="34" charset="-122"/>
+                <a:cs typeface="Arial" pitchFamily="34" charset="-120"/>
+              </a:rPr>
+              <a:t>Planes y precios</a:t>
+            </a:r>
+            <a:endParaRPr lang="en-US" sz="1600" dirty="0"/>
+          </a:p>
+        </p:txBody>
+      </p:sp>
     </p:spTree>
   </p:cSld>
   <p:clrMapOvr>
@@ -2822,6 +4099,375 @@
           </a:p>
         </p:txBody>
       </p:sp>
+      <p:sp>
+        <p:nvSpPr>
+          <p:cNvPr id="4" name="Text 2"/>
+          <p:cNvSpPr/>
+          <p:nvPr/>
+        </p:nvSpPr>
+        <p:spPr>
+          <a:xfrm>
+            <a:off x="457200" y="868680"/>
+            <a:ext cx="10972800" cy="502920"/>
+          </a:xfrm>
+          <a:prstGeom prst="rect">
+            <a:avLst/>
+          </a:prstGeom>
+          <a:noFill/>
+          <a:ln/>
+        </p:spPr>
+        <p:txBody>
+          <a:bodyPr wrap="square" rtlCol="0" anchor="t">
+            <a:normAutofit/>
+          </a:bodyPr>
+          <a:lstStyle/>
+          <a:p>
+            <a:pPr indent="0" marL="0">
+              <a:buNone/>
+            </a:pPr>
+            <a:r>
+              <a:rPr lang="en-US" sz="2200" b="1" dirty="0">
+                <a:solidFill>
+                  <a:srgbClr val="1A1A1A"/>
+                </a:solidFill>
+                <a:latin typeface="Arial" pitchFamily="34" charset="0"/>
+                <a:ea typeface="Arial" pitchFamily="34" charset="-122"/>
+                <a:cs typeface="Arial" pitchFamily="34" charset="-120"/>
+              </a:rPr>
+              <a:t>Por qué importan los logotipos</a:t>
+            </a:r>
+            <a:endParaRPr lang="en-US" sz="2200" dirty="0"/>
+          </a:p>
+        </p:txBody>
+      </p:sp>
+      <p:sp>
+        <p:nvSpPr>
+          <p:cNvPr id="5" name="Text 3"/>
+          <p:cNvSpPr/>
+          <p:nvPr/>
+        </p:nvSpPr>
+        <p:spPr>
+          <a:xfrm>
+            <a:off x="457200" y="1481328"/>
+            <a:ext cx="10972800" cy="668528"/>
+          </a:xfrm>
+          <a:prstGeom prst="rect">
+            <a:avLst/>
+          </a:prstGeom>
+          <a:noFill/>
+          <a:ln/>
+        </p:spPr>
+        <p:txBody>
+          <a:bodyPr wrap="square" rtlCol="0" anchor="t">
+            <a:normAutofit/>
+          </a:bodyPr>
+          <a:lstStyle/>
+          <a:p>
+            <a:pPr indent="0" marL="0">
+              <a:buNone/>
+            </a:pPr>
+            <a:r>
+              <a:rPr lang="en-US" sz="2200" b="1" dirty="0">
+                <a:solidFill>
+                  <a:srgbClr val="1A1A1A"/>
+                </a:solidFill>
+                <a:latin typeface="Arial" pitchFamily="34" charset="0"/>
+                <a:ea typeface="Arial" pitchFamily="34" charset="-122"/>
+                <a:cs typeface="Arial" pitchFamily="34" charset="-120"/>
+              </a:rPr>
+              <a:t>El tiempo que tardan los consumidores en formar una primera impresión de un negocio.</a:t>
+            </a:r>
+            <a:endParaRPr lang="en-US" sz="2200" dirty="0"/>
+          </a:p>
+        </p:txBody>
+      </p:sp>
+      <p:sp>
+        <p:nvSpPr>
+          <p:cNvPr id="6" name="Text 4"/>
+          <p:cNvSpPr/>
+          <p:nvPr/>
+        </p:nvSpPr>
+        <p:spPr>
+          <a:xfrm>
+            <a:off x="457200" y="2259584"/>
+            <a:ext cx="10972800" cy="502920"/>
+          </a:xfrm>
+          <a:prstGeom prst="rect">
+            <a:avLst/>
+          </a:prstGeom>
+          <a:noFill/>
+          <a:ln/>
+        </p:spPr>
+        <p:txBody>
+          <a:bodyPr wrap="square" rtlCol="0" anchor="t">
+            <a:normAutofit/>
+          </a:bodyPr>
+          <a:lstStyle/>
+          <a:p>
+            <a:pPr indent="0" marL="0">
+              <a:buNone/>
+            </a:pPr>
+            <a:r>
+              <a:rPr lang="en-US" sz="1300" dirty="0">
+                <a:solidFill>
+                  <a:srgbClr val="4A4A4A"/>
+                </a:solidFill>
+                <a:latin typeface="Arial" pitchFamily="34" charset="0"/>
+                <a:ea typeface="Arial" pitchFamily="34" charset="-122"/>
+                <a:cs typeface="Arial" pitchFamily="34" charset="-120"/>
+              </a:rPr>
+              <a:t>Un logotipo profesional es la señal visual más fuerte que define esa impresión — y el cerebro decide si confiar en un negocio en ese instante.</a:t>
+            </a:r>
+            <a:endParaRPr lang="en-US" sz="1300" dirty="0"/>
+          </a:p>
+        </p:txBody>
+      </p:sp>
+      <p:sp>
+        <p:nvSpPr>
+          <p:cNvPr id="7" name="Text 5"/>
+          <p:cNvSpPr/>
+          <p:nvPr/>
+        </p:nvSpPr>
+        <p:spPr>
+          <a:xfrm>
+            <a:off x="457200" y="2899664"/>
+            <a:ext cx="10972800" cy="502920"/>
+          </a:xfrm>
+          <a:prstGeom prst="rect">
+            <a:avLst/>
+          </a:prstGeom>
+          <a:noFill/>
+          <a:ln/>
+        </p:spPr>
+        <p:txBody>
+          <a:bodyPr wrap="square" rtlCol="0" anchor="t">
+            <a:normAutofit/>
+          </a:bodyPr>
+          <a:lstStyle/>
+          <a:p>
+            <a:pPr indent="0" marL="0">
+              <a:buNone/>
+            </a:pPr>
+            <a:r>
+              <a:rPr lang="en-US" sz="1600" b="1" dirty="0">
+                <a:solidFill>
+                  <a:srgbClr val="1A1A1A"/>
+                </a:solidFill>
+                <a:latin typeface="Arial" pitchFamily="34" charset="0"/>
+                <a:ea typeface="Arial" pitchFamily="34" charset="-122"/>
+                <a:cs typeface="Arial" pitchFamily="34" charset="-120"/>
+              </a:rPr>
+              <a:t>Aumento de reconocimiento</a:t>
+            </a:r>
+            <a:endParaRPr lang="en-US" sz="1600" dirty="0"/>
+          </a:p>
+        </p:txBody>
+      </p:sp>
+      <p:sp>
+        <p:nvSpPr>
+          <p:cNvPr id="8" name="Text 6"/>
+          <p:cNvSpPr/>
+          <p:nvPr/>
+        </p:nvSpPr>
+        <p:spPr>
+          <a:xfrm>
+            <a:off x="457200" y="3512312"/>
+            <a:ext cx="10972800" cy="502920"/>
+          </a:xfrm>
+          <a:prstGeom prst="rect">
+            <a:avLst/>
+          </a:prstGeom>
+          <a:noFill/>
+          <a:ln/>
+        </p:spPr>
+        <p:txBody>
+          <a:bodyPr wrap="square" rtlCol="0" anchor="t">
+            <a:normAutofit/>
+          </a:bodyPr>
+          <a:lstStyle/>
+          <a:p>
+            <a:pPr indent="0" marL="0">
+              <a:buNone/>
+            </a:pPr>
+            <a:r>
+              <a:rPr lang="en-US" sz="1300" dirty="0">
+                <a:solidFill>
+                  <a:srgbClr val="4A4A4A"/>
+                </a:solidFill>
+                <a:latin typeface="Arial" pitchFamily="34" charset="0"/>
+                <a:ea typeface="Arial" pitchFamily="34" charset="-122"/>
+                <a:cs typeface="Arial" pitchFamily="34" charset="-120"/>
+              </a:rPr>
+              <a:t>Aumento del reconocimiento de marca gracias a un logotipo bien diseñado.</a:t>
+            </a:r>
+            <a:endParaRPr lang="en-US" sz="1300" dirty="0"/>
+          </a:p>
+        </p:txBody>
+      </p:sp>
+      <p:sp>
+        <p:nvSpPr>
+          <p:cNvPr id="9" name="Text 7"/>
+          <p:cNvSpPr/>
+          <p:nvPr/>
+        </p:nvSpPr>
+        <p:spPr>
+          <a:xfrm>
+            <a:off x="457200" y="4152392"/>
+            <a:ext cx="10972800" cy="502920"/>
+          </a:xfrm>
+          <a:prstGeom prst="rect">
+            <a:avLst/>
+          </a:prstGeom>
+          <a:noFill/>
+          <a:ln/>
+        </p:spPr>
+        <p:txBody>
+          <a:bodyPr wrap="square" rtlCol="0" anchor="t">
+            <a:normAutofit/>
+          </a:bodyPr>
+          <a:lstStyle/>
+          <a:p>
+            <a:pPr indent="0" marL="0">
+              <a:buNone/>
+            </a:pPr>
+            <a:r>
+              <a:rPr lang="en-US" sz="1600" b="1" dirty="0">
+                <a:solidFill>
+                  <a:srgbClr val="1A1A1A"/>
+                </a:solidFill>
+                <a:latin typeface="Arial" pitchFamily="34" charset="0"/>
+                <a:ea typeface="Arial" pitchFamily="34" charset="-122"/>
+                <a:cs typeface="Arial" pitchFamily="34" charset="-120"/>
+              </a:rPr>
+              <a:t>Impulso de confianza</a:t>
+            </a:r>
+            <a:endParaRPr lang="en-US" sz="1600" dirty="0"/>
+          </a:p>
+        </p:txBody>
+      </p:sp>
+      <p:sp>
+        <p:nvSpPr>
+          <p:cNvPr id="10" name="Text 8"/>
+          <p:cNvSpPr/>
+          <p:nvPr/>
+        </p:nvSpPr>
+        <p:spPr>
+          <a:xfrm>
+            <a:off x="457200" y="4765040"/>
+            <a:ext cx="10972800" cy="502920"/>
+          </a:xfrm>
+          <a:prstGeom prst="rect">
+            <a:avLst/>
+          </a:prstGeom>
+          <a:noFill/>
+          <a:ln/>
+        </p:spPr>
+        <p:txBody>
+          <a:bodyPr wrap="square" rtlCol="0" anchor="t">
+            <a:normAutofit/>
+          </a:bodyPr>
+          <a:lstStyle/>
+          <a:p>
+            <a:pPr indent="0" marL="0">
+              <a:buNone/>
+            </a:pPr>
+            <a:r>
+              <a:rPr lang="en-US" sz="1300" dirty="0">
+                <a:solidFill>
+                  <a:srgbClr val="4A4A4A"/>
+                </a:solidFill>
+                <a:latin typeface="Arial" pitchFamily="34" charset="0"/>
+                <a:ea typeface="Arial" pitchFamily="34" charset="-122"/>
+                <a:cs typeface="Arial" pitchFamily="34" charset="-120"/>
+              </a:rPr>
+              <a:t>Aumento de confianza que sienten los prospectos al ver un logotipo pulido.</a:t>
+            </a:r>
+            <a:endParaRPr lang="en-US" sz="1300" dirty="0"/>
+          </a:p>
+        </p:txBody>
+      </p:sp>
+      <p:sp>
+        <p:nvSpPr>
+          <p:cNvPr id="11" name="Text 9"/>
+          <p:cNvSpPr/>
+          <p:nvPr/>
+        </p:nvSpPr>
+        <p:spPr>
+          <a:xfrm>
+            <a:off x="457200" y="5405120"/>
+            <a:ext cx="10972800" cy="502920"/>
+          </a:xfrm>
+          <a:prstGeom prst="rect">
+            <a:avLst/>
+          </a:prstGeom>
+          <a:noFill/>
+          <a:ln/>
+        </p:spPr>
+        <p:txBody>
+          <a:bodyPr wrap="square" rtlCol="0" anchor="t">
+            <a:normAutofit/>
+          </a:bodyPr>
+          <a:lstStyle/>
+          <a:p>
+            <a:pPr indent="0" marL="0">
+              <a:buNone/>
+            </a:pPr>
+            <a:r>
+              <a:rPr lang="en-US" sz="1600" b="1" dirty="0">
+                <a:solidFill>
+                  <a:srgbClr val="1A1A1A"/>
+                </a:solidFill>
+                <a:latin typeface="Arial" pitchFamily="34" charset="0"/>
+                <a:ea typeface="Arial" pitchFamily="34" charset="-122"/>
+                <a:cs typeface="Arial" pitchFamily="34" charset="-120"/>
+              </a:rPr>
+              <a:t>Peso de la impresión</a:t>
+            </a:r>
+            <a:endParaRPr lang="en-US" sz="1600" dirty="0"/>
+          </a:p>
+        </p:txBody>
+      </p:sp>
+      <p:sp>
+        <p:nvSpPr>
+          <p:cNvPr id="12" name="Text 10"/>
+          <p:cNvSpPr/>
+          <p:nvPr/>
+        </p:nvSpPr>
+        <p:spPr>
+          <a:xfrm>
+            <a:off x="457200" y="6017768"/>
+            <a:ext cx="10972800" cy="502920"/>
+          </a:xfrm>
+          <a:prstGeom prst="rect">
+            <a:avLst/>
+          </a:prstGeom>
+          <a:noFill/>
+          <a:ln/>
+        </p:spPr>
+        <p:txBody>
+          <a:bodyPr wrap="square" rtlCol="0" anchor="t">
+            <a:normAutofit/>
+          </a:bodyPr>
+          <a:lstStyle/>
+          <a:p>
+            <a:pPr indent="0" marL="0">
+              <a:buNone/>
+            </a:pPr>
+            <a:r>
+              <a:rPr lang="en-US" sz="1300" dirty="0">
+                <a:solidFill>
+                  <a:srgbClr val="4A4A4A"/>
+                </a:solidFill>
+                <a:latin typeface="Arial" pitchFamily="34" charset="0"/>
+                <a:ea typeface="Arial" pitchFamily="34" charset="-122"/>
+                <a:cs typeface="Arial" pitchFamily="34" charset="-120"/>
+              </a:rPr>
+              <a:t>Proporción del peso de la primera impresión que aporta solo el color del logotipo.</a:t>
+            </a:r>
+            <a:endParaRPr lang="en-US" sz="1300" dirty="0"/>
+          </a:p>
+        </p:txBody>
+      </p:sp>
     </p:spTree>
   </p:cSld>
   <p:clrMapOvr>
@@ -2932,6 +4578,375 @@
           </a:p>
         </p:txBody>
       </p:sp>
+      <p:sp>
+        <p:nvSpPr>
+          <p:cNvPr id="4" name="Text 2"/>
+          <p:cNvSpPr/>
+          <p:nvPr/>
+        </p:nvSpPr>
+        <p:spPr>
+          <a:xfrm>
+            <a:off x="457200" y="868680"/>
+            <a:ext cx="10972800" cy="502920"/>
+          </a:xfrm>
+          <a:prstGeom prst="rect">
+            <a:avLst/>
+          </a:prstGeom>
+          <a:noFill/>
+          <a:ln/>
+        </p:spPr>
+        <p:txBody>
+          <a:bodyPr wrap="square" rtlCol="0" anchor="t">
+            <a:normAutofit/>
+          </a:bodyPr>
+          <a:lstStyle/>
+          <a:p>
+            <a:pPr indent="0" marL="0">
+              <a:buNone/>
+            </a:pPr>
+            <a:r>
+              <a:rPr lang="en-US" sz="2200" b="1" dirty="0">
+                <a:solidFill>
+                  <a:srgbClr val="1A1A1A"/>
+                </a:solidFill>
+                <a:latin typeface="Arial" pitchFamily="34" charset="0"/>
+                <a:ea typeface="Arial" pitchFamily="34" charset="-122"/>
+                <a:cs typeface="Arial" pitchFamily="34" charset="-120"/>
+              </a:rPr>
+              <a:t>Lo que está en juego</a:t>
+            </a:r>
+            <a:endParaRPr lang="en-US" sz="2200" dirty="0"/>
+          </a:p>
+        </p:txBody>
+      </p:sp>
+      <p:sp>
+        <p:nvSpPr>
+          <p:cNvPr id="5" name="Text 3"/>
+          <p:cNvSpPr/>
+          <p:nvPr/>
+        </p:nvSpPr>
+        <p:spPr>
+          <a:xfrm>
+            <a:off x="457200" y="1481328"/>
+            <a:ext cx="10972800" cy="502920"/>
+          </a:xfrm>
+          <a:prstGeom prst="rect">
+            <a:avLst/>
+          </a:prstGeom>
+          <a:noFill/>
+          <a:ln/>
+        </p:spPr>
+        <p:txBody>
+          <a:bodyPr wrap="square" rtlCol="0" anchor="t">
+            <a:normAutofit/>
+          </a:bodyPr>
+          <a:lstStyle/>
+          <a:p>
+            <a:pPr indent="0" marL="0">
+              <a:buNone/>
+            </a:pPr>
+            <a:r>
+              <a:rPr lang="en-US" sz="2200" b="1" dirty="0">
+                <a:solidFill>
+                  <a:srgbClr val="1A1A1A"/>
+                </a:solidFill>
+                <a:latin typeface="Arial" pitchFamily="34" charset="0"/>
+                <a:ea typeface="Arial" pitchFamily="34" charset="-122"/>
+                <a:cs typeface="Arial" pitchFamily="34" charset="-120"/>
+              </a:rPr>
+              <a:t>El costo de un logotipo débil o ausente.</a:t>
+            </a:r>
+            <a:endParaRPr lang="en-US" sz="2200" dirty="0"/>
+          </a:p>
+        </p:txBody>
+      </p:sp>
+      <p:sp>
+        <p:nvSpPr>
+          <p:cNvPr id="6" name="Text 4"/>
+          <p:cNvSpPr/>
+          <p:nvPr/>
+        </p:nvSpPr>
+        <p:spPr>
+          <a:xfrm>
+            <a:off x="457200" y="2093976"/>
+            <a:ext cx="10972800" cy="502920"/>
+          </a:xfrm>
+          <a:prstGeom prst="rect">
+            <a:avLst/>
+          </a:prstGeom>
+          <a:noFill/>
+          <a:ln/>
+        </p:spPr>
+        <p:txBody>
+          <a:bodyPr wrap="square" rtlCol="0" anchor="t">
+            <a:normAutofit/>
+          </a:bodyPr>
+          <a:lstStyle/>
+          <a:p>
+            <a:pPr indent="0" marL="0">
+              <a:buNone/>
+            </a:pPr>
+            <a:r>
+              <a:rPr lang="en-US" sz="1600" b="1" dirty="0">
+                <a:solidFill>
+                  <a:srgbClr val="1A1A1A"/>
+                </a:solidFill>
+                <a:latin typeface="Arial" pitchFamily="34" charset="0"/>
+                <a:ea typeface="Arial" pitchFamily="34" charset="-122"/>
+                <a:cs typeface="Arial" pitchFamily="34" charset="-120"/>
+              </a:rPr>
+              <a:t>Costo 01</a:t>
+            </a:r>
+            <a:endParaRPr lang="en-US" sz="1600" dirty="0"/>
+          </a:p>
+        </p:txBody>
+      </p:sp>
+      <p:sp>
+        <p:nvSpPr>
+          <p:cNvPr id="7" name="Text 5"/>
+          <p:cNvSpPr/>
+          <p:nvPr/>
+        </p:nvSpPr>
+        <p:spPr>
+          <a:xfrm>
+            <a:off x="457200" y="2706624"/>
+            <a:ext cx="10972800" cy="502920"/>
+          </a:xfrm>
+          <a:prstGeom prst="rect">
+            <a:avLst/>
+          </a:prstGeom>
+          <a:noFill/>
+          <a:ln/>
+        </p:spPr>
+        <p:txBody>
+          <a:bodyPr wrap="square" rtlCol="0" anchor="t">
+            <a:normAutofit/>
+          </a:bodyPr>
+          <a:lstStyle/>
+          <a:p>
+            <a:pPr indent="0" marL="0">
+              <a:buNone/>
+            </a:pPr>
+            <a:r>
+              <a:rPr lang="en-US" sz="1600" b="1" dirty="0">
+                <a:solidFill>
+                  <a:srgbClr val="1A1A1A"/>
+                </a:solidFill>
+                <a:latin typeface="Arial" pitchFamily="34" charset="0"/>
+                <a:ea typeface="Arial" pitchFamily="34" charset="-122"/>
+                <a:cs typeface="Arial" pitchFamily="34" charset="-120"/>
+              </a:rPr>
+              <a:t>Credibilidad perdida</a:t>
+            </a:r>
+            <a:endParaRPr lang="en-US" sz="1600" dirty="0"/>
+          </a:p>
+        </p:txBody>
+      </p:sp>
+      <p:sp>
+        <p:nvSpPr>
+          <p:cNvPr id="8" name="Text 6"/>
+          <p:cNvSpPr/>
+          <p:nvPr/>
+        </p:nvSpPr>
+        <p:spPr>
+          <a:xfrm>
+            <a:off x="457200" y="3319272"/>
+            <a:ext cx="10972800" cy="502920"/>
+          </a:xfrm>
+          <a:prstGeom prst="rect">
+            <a:avLst/>
+          </a:prstGeom>
+          <a:noFill/>
+          <a:ln/>
+        </p:spPr>
+        <p:txBody>
+          <a:bodyPr wrap="square" rtlCol="0" anchor="t">
+            <a:normAutofit/>
+          </a:bodyPr>
+          <a:lstStyle/>
+          <a:p>
+            <a:pPr indent="0" marL="0">
+              <a:buNone/>
+            </a:pPr>
+            <a:r>
+              <a:rPr lang="en-US" sz="1300" dirty="0">
+                <a:solidFill>
+                  <a:srgbClr val="4A4A4A"/>
+                </a:solidFill>
+                <a:latin typeface="Arial" pitchFamily="34" charset="0"/>
+                <a:ea typeface="Arial" pitchFamily="34" charset="-122"/>
+                <a:cs typeface="Arial" pitchFamily="34" charset="-120"/>
+              </a:rPr>
+              <a:t>Un logotipo hace que un negocio parezca establecido. Sin uno, los prospectos eligen al competidor que parezca más profesional.</a:t>
+            </a:r>
+            <a:endParaRPr lang="en-US" sz="1300" dirty="0"/>
+          </a:p>
+        </p:txBody>
+      </p:sp>
+      <p:sp>
+        <p:nvSpPr>
+          <p:cNvPr id="9" name="Text 7"/>
+          <p:cNvSpPr/>
+          <p:nvPr/>
+        </p:nvSpPr>
+        <p:spPr>
+          <a:xfrm>
+            <a:off x="457200" y="3959352"/>
+            <a:ext cx="10972800" cy="502920"/>
+          </a:xfrm>
+          <a:prstGeom prst="rect">
+            <a:avLst/>
+          </a:prstGeom>
+          <a:noFill/>
+          <a:ln/>
+        </p:spPr>
+        <p:txBody>
+          <a:bodyPr wrap="square" rtlCol="0" anchor="t">
+            <a:normAutofit/>
+          </a:bodyPr>
+          <a:lstStyle/>
+          <a:p>
+            <a:pPr indent="0" marL="0">
+              <a:buNone/>
+            </a:pPr>
+            <a:r>
+              <a:rPr lang="en-US" sz="1600" b="1" dirty="0">
+                <a:solidFill>
+                  <a:srgbClr val="1A1A1A"/>
+                </a:solidFill>
+                <a:latin typeface="Arial" pitchFamily="34" charset="0"/>
+                <a:ea typeface="Arial" pitchFamily="34" charset="-122"/>
+                <a:cs typeface="Arial" pitchFamily="34" charset="-120"/>
+              </a:rPr>
+              <a:t>Costo 02</a:t>
+            </a:r>
+            <a:endParaRPr lang="en-US" sz="1600" dirty="0"/>
+          </a:p>
+        </p:txBody>
+      </p:sp>
+      <p:sp>
+        <p:nvSpPr>
+          <p:cNvPr id="10" name="Text 8"/>
+          <p:cNvSpPr/>
+          <p:nvPr/>
+        </p:nvSpPr>
+        <p:spPr>
+          <a:xfrm>
+            <a:off x="457200" y="4572000"/>
+            <a:ext cx="10972800" cy="502920"/>
+          </a:xfrm>
+          <a:prstGeom prst="rect">
+            <a:avLst/>
+          </a:prstGeom>
+          <a:noFill/>
+          <a:ln/>
+        </p:spPr>
+        <p:txBody>
+          <a:bodyPr wrap="square" rtlCol="0" anchor="t">
+            <a:normAutofit/>
+          </a:bodyPr>
+          <a:lstStyle/>
+          <a:p>
+            <a:pPr indent="0" marL="0">
+              <a:buNone/>
+            </a:pPr>
+            <a:r>
+              <a:rPr lang="en-US" sz="1600" b="1" dirty="0">
+                <a:solidFill>
+                  <a:srgbClr val="1A1A1A"/>
+                </a:solidFill>
+                <a:latin typeface="Arial" pitchFamily="34" charset="0"/>
+                <a:ea typeface="Arial" pitchFamily="34" charset="-122"/>
+                <a:cs typeface="Arial" pitchFamily="34" charset="-120"/>
+              </a:rPr>
+              <a:t>Diferenciación perdida</a:t>
+            </a:r>
+            <a:endParaRPr lang="en-US" sz="1600" dirty="0"/>
+          </a:p>
+        </p:txBody>
+      </p:sp>
+      <p:sp>
+        <p:nvSpPr>
+          <p:cNvPr id="11" name="Text 9"/>
+          <p:cNvSpPr/>
+          <p:nvPr/>
+        </p:nvSpPr>
+        <p:spPr>
+          <a:xfrm>
+            <a:off x="457200" y="5184648"/>
+            <a:ext cx="10972800" cy="502920"/>
+          </a:xfrm>
+          <a:prstGeom prst="rect">
+            <a:avLst/>
+          </a:prstGeom>
+          <a:noFill/>
+          <a:ln/>
+        </p:spPr>
+        <p:txBody>
+          <a:bodyPr wrap="square" rtlCol="0" anchor="t">
+            <a:normAutofit/>
+          </a:bodyPr>
+          <a:lstStyle/>
+          <a:p>
+            <a:pPr indent="0" marL="0">
+              <a:buNone/>
+            </a:pPr>
+            <a:r>
+              <a:rPr lang="en-US" sz="1300" dirty="0">
+                <a:solidFill>
+                  <a:srgbClr val="4A4A4A"/>
+                </a:solidFill>
+                <a:latin typeface="Arial" pitchFamily="34" charset="0"/>
+                <a:ea typeface="Arial" pitchFamily="34" charset="-122"/>
+                <a:cs typeface="Arial" pitchFamily="34" charset="-120"/>
+              </a:rPr>
+              <a:t>Los logotipos son cómo los clientes distinguen un negocio de otro. Una marca genérica o ausente significa que los clientes no pueden encontrarle.</a:t>
+            </a:r>
+            <a:endParaRPr lang="en-US" sz="1300" dirty="0"/>
+          </a:p>
+        </p:txBody>
+      </p:sp>
+      <p:sp>
+        <p:nvSpPr>
+          <p:cNvPr id="12" name="Text 10"/>
+          <p:cNvSpPr/>
+          <p:nvPr/>
+        </p:nvSpPr>
+        <p:spPr>
+          <a:xfrm>
+            <a:off x="457200" y="5824728"/>
+            <a:ext cx="10972800" cy="502920"/>
+          </a:xfrm>
+          <a:prstGeom prst="rect">
+            <a:avLst/>
+          </a:prstGeom>
+          <a:noFill/>
+          <a:ln/>
+        </p:spPr>
+        <p:txBody>
+          <a:bodyPr wrap="square" rtlCol="0" anchor="t">
+            <a:normAutofit/>
+          </a:bodyPr>
+          <a:lstStyle/>
+          <a:p>
+            <a:pPr indent="0" marL="0">
+              <a:buNone/>
+            </a:pPr>
+            <a:r>
+              <a:rPr lang="en-US" sz="1600" b="1" dirty="0">
+                <a:solidFill>
+                  <a:srgbClr val="1A1A1A"/>
+                </a:solidFill>
+                <a:latin typeface="Arial" pitchFamily="34" charset="0"/>
+                <a:ea typeface="Arial" pitchFamily="34" charset="-122"/>
+                <a:cs typeface="Arial" pitchFamily="34" charset="-120"/>
+              </a:rPr>
+              <a:t>Costo 03</a:t>
+            </a:r>
+            <a:endParaRPr lang="en-US" sz="1600" dirty="0"/>
+          </a:p>
+        </p:txBody>
+      </p:sp>
     </p:spTree>
   </p:cSld>
   <p:clrMapOvr>
@@ -3042,9 +5057,378 @@
           </a:p>
         </p:txBody>
       </p:sp>
+      <p:sp>
+        <p:nvSpPr>
+          <p:cNvPr id="4" name="Text 2"/>
+          <p:cNvSpPr/>
+          <p:nvPr/>
+        </p:nvSpPr>
+        <p:spPr>
+          <a:xfrm>
+            <a:off x="457200" y="868680"/>
+            <a:ext cx="6949440" cy="502920"/>
+          </a:xfrm>
+          <a:prstGeom prst="rect">
+            <a:avLst/>
+          </a:prstGeom>
+          <a:noFill/>
+          <a:ln/>
+        </p:spPr>
+        <p:txBody>
+          <a:bodyPr wrap="square" rtlCol="0" anchor="t">
+            <a:normAutofit/>
+          </a:bodyPr>
+          <a:lstStyle/>
+          <a:p>
+            <a:pPr indent="0" marL="0">
+              <a:buNone/>
+            </a:pPr>
+            <a:r>
+              <a:rPr lang="en-US" sz="2200" b="1" dirty="0">
+                <a:solidFill>
+                  <a:srgbClr val="1A1A1A"/>
+                </a:solidFill>
+                <a:latin typeface="Arial" pitchFamily="34" charset="0"/>
+                <a:ea typeface="Arial" pitchFamily="34" charset="-122"/>
+                <a:cs typeface="Arial" pitchFamily="34" charset="-120"/>
+              </a:rPr>
+              <a:t>El producto</a:t>
+            </a:r>
+            <a:endParaRPr lang="en-US" sz="2200" dirty="0"/>
+          </a:p>
+        </p:txBody>
+      </p:sp>
+      <p:sp>
+        <p:nvSpPr>
+          <p:cNvPr id="5" name="Text 3"/>
+          <p:cNvSpPr/>
+          <p:nvPr/>
+        </p:nvSpPr>
+        <p:spPr>
+          <a:xfrm>
+            <a:off x="457200" y="1481328"/>
+            <a:ext cx="6949440" cy="502920"/>
+          </a:xfrm>
+          <a:prstGeom prst="rect">
+            <a:avLst/>
+          </a:prstGeom>
+          <a:noFill/>
+          <a:ln/>
+        </p:spPr>
+        <p:txBody>
+          <a:bodyPr wrap="square" rtlCol="0" anchor="t">
+            <a:normAutofit/>
+          </a:bodyPr>
+          <a:lstStyle/>
+          <a:p>
+            <a:pPr indent="0" marL="0">
+              <a:buNone/>
+            </a:pPr>
+            <a:r>
+              <a:rPr lang="en-US" sz="2200" b="1" dirty="0">
+                <a:solidFill>
+                  <a:srgbClr val="1A1A1A"/>
+                </a:solidFill>
+                <a:latin typeface="Arial" pitchFamily="34" charset="0"/>
+                <a:ea typeface="Arial" pitchFamily="34" charset="-122"/>
+                <a:cs typeface="Arial" pitchFamily="34" charset="-120"/>
+              </a:rPr>
+              <a:t>Qué lo hace diferente.</a:t>
+            </a:r>
+            <a:endParaRPr lang="en-US" sz="2200" dirty="0"/>
+          </a:p>
+        </p:txBody>
+      </p:sp>
+      <p:sp>
+        <p:nvSpPr>
+          <p:cNvPr id="6" name="Text 4"/>
+          <p:cNvSpPr/>
+          <p:nvPr/>
+        </p:nvSpPr>
+        <p:spPr>
+          <a:xfrm>
+            <a:off x="457200" y="2093976"/>
+            <a:ext cx="6949440" cy="502920"/>
+          </a:xfrm>
+          <a:prstGeom prst="rect">
+            <a:avLst/>
+          </a:prstGeom>
+          <a:noFill/>
+          <a:ln/>
+        </p:spPr>
+        <p:txBody>
+          <a:bodyPr wrap="square" rtlCol="0" anchor="t">
+            <a:normAutofit/>
+          </a:bodyPr>
+          <a:lstStyle/>
+          <a:p>
+            <a:pPr indent="0" marL="0">
+              <a:buNone/>
+            </a:pPr>
+            <a:r>
+              <a:rPr lang="en-US" sz="1300" dirty="0">
+                <a:solidFill>
+                  <a:srgbClr val="4A4A4A"/>
+                </a:solidFill>
+                <a:latin typeface="Arial" pitchFamily="34" charset="0"/>
+                <a:ea typeface="Arial" pitchFamily="34" charset="-122"/>
+                <a:cs typeface="Arial" pitchFamily="34" charset="-120"/>
+              </a:rPr>
+              <a:t>Cuatro fundamentos del producto que separan al Diseño de Logotipo Profesional de las herramientas gratuitas, freelancers y generadores de IA.</a:t>
+            </a:r>
+            <a:endParaRPr lang="en-US" sz="1300" dirty="0"/>
+          </a:p>
+        </p:txBody>
+      </p:sp>
+      <p:sp>
+        <p:nvSpPr>
+          <p:cNvPr id="7" name="Text 5"/>
+          <p:cNvSpPr/>
+          <p:nvPr/>
+        </p:nvSpPr>
+        <p:spPr>
+          <a:xfrm>
+            <a:off x="457200" y="2734056"/>
+            <a:ext cx="6949440" cy="502920"/>
+          </a:xfrm>
+          <a:prstGeom prst="rect">
+            <a:avLst/>
+          </a:prstGeom>
+          <a:noFill/>
+          <a:ln/>
+        </p:spPr>
+        <p:txBody>
+          <a:bodyPr wrap="square" rtlCol="0" anchor="t">
+            <a:normAutofit/>
+          </a:bodyPr>
+          <a:lstStyle/>
+          <a:p>
+            <a:pPr indent="0" marL="0">
+              <a:buNone/>
+            </a:pPr>
+            <a:r>
+              <a:rPr lang="en-US" sz="1600" b="1" dirty="0">
+                <a:solidFill>
+                  <a:srgbClr val="1A1A1A"/>
+                </a:solidFill>
+                <a:latin typeface="Arial" pitchFamily="34" charset="0"/>
+                <a:ea typeface="Arial" pitchFamily="34" charset="-122"/>
+                <a:cs typeface="Arial" pitchFamily="34" charset="-120"/>
+              </a:rPr>
+              <a:t>Personas, no prompts.</a:t>
+            </a:r>
+            <a:endParaRPr lang="en-US" sz="1600" dirty="0"/>
+          </a:p>
+        </p:txBody>
+      </p:sp>
+      <p:sp>
+        <p:nvSpPr>
+          <p:cNvPr id="8" name="Text 6"/>
+          <p:cNvSpPr/>
+          <p:nvPr/>
+        </p:nvSpPr>
+        <p:spPr>
+          <a:xfrm>
+            <a:off x="457200" y="3346704"/>
+            <a:ext cx="6949440" cy="605028"/>
+          </a:xfrm>
+          <a:prstGeom prst="rect">
+            <a:avLst/>
+          </a:prstGeom>
+          <a:noFill/>
+          <a:ln/>
+        </p:spPr>
+        <p:txBody>
+          <a:bodyPr wrap="square" rtlCol="0" anchor="t">
+            <a:normAutofit/>
+          </a:bodyPr>
+          <a:lstStyle/>
+          <a:p>
+            <a:pPr indent="0" marL="0">
+              <a:buNone/>
+            </a:pPr>
+            <a:r>
+              <a:rPr lang="en-US" sz="1300" dirty="0">
+                <a:solidFill>
+                  <a:srgbClr val="4A4A4A"/>
+                </a:solidFill>
+                <a:latin typeface="Arial" pitchFamily="34" charset="0"/>
+                <a:ea typeface="Arial" pitchFamily="34" charset="-122"/>
+                <a:cs typeface="Arial" pitchFamily="34" charset="-120"/>
+              </a:rPr>
+              <a:t>Más de diez años de experiencia y más de 75.000 logotipos entregados. En 2025, el 20% de los logotipos son generados por IA — lo que hace que las marcas diseñadas por humanos sean más diferenciadas, no menos.</a:t>
+            </a:r>
+            <a:endParaRPr lang="en-US" sz="1300" dirty="0"/>
+          </a:p>
+        </p:txBody>
+      </p:sp>
+      <p:sp>
+        <p:nvSpPr>
+          <p:cNvPr id="9" name="Text 7"/>
+          <p:cNvSpPr/>
+          <p:nvPr/>
+        </p:nvSpPr>
+        <p:spPr>
+          <a:xfrm>
+            <a:off x="457200" y="4088892"/>
+            <a:ext cx="6949440" cy="502920"/>
+          </a:xfrm>
+          <a:prstGeom prst="rect">
+            <a:avLst/>
+          </a:prstGeom>
+          <a:noFill/>
+          <a:ln/>
+        </p:spPr>
+        <p:txBody>
+          <a:bodyPr wrap="square" rtlCol="0" anchor="t">
+            <a:normAutofit/>
+          </a:bodyPr>
+          <a:lstStyle/>
+          <a:p>
+            <a:pPr indent="0" marL="0">
+              <a:buNone/>
+            </a:pPr>
+            <a:r>
+              <a:rPr lang="en-US" sz="1600" b="1" dirty="0">
+                <a:solidFill>
+                  <a:srgbClr val="1A1A1A"/>
+                </a:solidFill>
+                <a:latin typeface="Arial" pitchFamily="34" charset="0"/>
+                <a:ea typeface="Arial" pitchFamily="34" charset="-122"/>
+                <a:cs typeface="Arial" pitchFamily="34" charset="-120"/>
+              </a:rPr>
+              <a:t>El cliente posee la marca por completo.</a:t>
+            </a:r>
+            <a:endParaRPr lang="en-US" sz="1600" dirty="0"/>
+          </a:p>
+        </p:txBody>
+      </p:sp>
+      <p:sp>
+        <p:nvSpPr>
+          <p:cNvPr id="10" name="Text 8"/>
+          <p:cNvSpPr/>
+          <p:nvPr/>
+        </p:nvSpPr>
+        <p:spPr>
+          <a:xfrm>
+            <a:off x="457200" y="4701540"/>
+            <a:ext cx="6949440" cy="605028"/>
+          </a:xfrm>
+          <a:prstGeom prst="rect">
+            <a:avLst/>
+          </a:prstGeom>
+          <a:noFill/>
+          <a:ln/>
+        </p:spPr>
+        <p:txBody>
+          <a:bodyPr wrap="square" rtlCol="0" anchor="t">
+            <a:normAutofit/>
+          </a:bodyPr>
+          <a:lstStyle/>
+          <a:p>
+            <a:pPr indent="0" marL="0">
+              <a:buNone/>
+            </a:pPr>
+            <a:r>
+              <a:rPr lang="en-US" sz="1300" dirty="0">
+                <a:solidFill>
+                  <a:srgbClr val="4A4A4A"/>
+                </a:solidFill>
+                <a:latin typeface="Arial" pitchFamily="34" charset="0"/>
+                <a:ea typeface="Arial" pitchFamily="34" charset="-122"/>
+                <a:cs typeface="Arial" pitchFamily="34" charset="-120"/>
+              </a:rPr>
+              <a:t>Registrable como marca. Libre de regalías. Cada proyecto incluye una carta formal de transferencia de derechos. Las herramientas gratuitas rara vez transfieren todos los derechos.</a:t>
+            </a:r>
+            <a:endParaRPr lang="en-US" sz="1300" dirty="0"/>
+          </a:p>
+        </p:txBody>
+      </p:sp>
+      <p:sp>
+        <p:nvSpPr>
+          <p:cNvPr id="11" name="Text 9"/>
+          <p:cNvSpPr/>
+          <p:nvPr/>
+        </p:nvSpPr>
+        <p:spPr>
+          <a:xfrm>
+            <a:off x="457200" y="5443728"/>
+            <a:ext cx="6949440" cy="502920"/>
+          </a:xfrm>
+          <a:prstGeom prst="rect">
+            <a:avLst/>
+          </a:prstGeom>
+          <a:noFill/>
+          <a:ln/>
+        </p:spPr>
+        <p:txBody>
+          <a:bodyPr wrap="square" rtlCol="0" anchor="t">
+            <a:normAutofit/>
+          </a:bodyPr>
+          <a:lstStyle/>
+          <a:p>
+            <a:pPr indent="0" marL="0">
+              <a:buNone/>
+            </a:pPr>
+            <a:r>
+              <a:rPr lang="en-US" sz="1600" b="1" dirty="0">
+                <a:solidFill>
+                  <a:srgbClr val="1A1A1A"/>
+                </a:solidFill>
+                <a:latin typeface="Arial" pitchFamily="34" charset="0"/>
+                <a:ea typeface="Arial" pitchFamily="34" charset="-122"/>
+                <a:cs typeface="Arial" pitchFamily="34" charset="-120"/>
+              </a:rPr>
+              <a:t>Listo para cada aplicación.</a:t>
+            </a:r>
+            <a:endParaRPr lang="en-US" sz="1600" dirty="0"/>
+          </a:p>
+        </p:txBody>
+      </p:sp>
+      <p:sp>
+        <p:nvSpPr>
+          <p:cNvPr id="12" name="Text 10"/>
+          <p:cNvSpPr/>
+          <p:nvPr/>
+        </p:nvSpPr>
+        <p:spPr>
+          <a:xfrm>
+            <a:off x="457200" y="6056376"/>
+            <a:ext cx="6949440" cy="502920"/>
+          </a:xfrm>
+          <a:prstGeom prst="rect">
+            <a:avLst/>
+          </a:prstGeom>
+          <a:noFill/>
+          <a:ln/>
+        </p:spPr>
+        <p:txBody>
+          <a:bodyPr wrap="square" rtlCol="0" anchor="t">
+            <a:normAutofit/>
+          </a:bodyPr>
+          <a:lstStyle/>
+          <a:p>
+            <a:pPr indent="0" marL="0">
+              <a:buNone/>
+            </a:pPr>
+            <a:r>
+              <a:rPr lang="en-US" sz="1300" dirty="0">
+                <a:solidFill>
+                  <a:srgbClr val="4A4A4A"/>
+                </a:solidFill>
+                <a:latin typeface="Arial" pitchFamily="34" charset="0"/>
+                <a:ea typeface="Arial" pitchFamily="34" charset="-122"/>
+                <a:cs typeface="Arial" pitchFamily="34" charset="-120"/>
+              </a:rPr>
+              <a:t>AI, EPS, PDF, JPG, PNG, GIF e ICO — seis versiones en color y cinco en blanco y negro. Web, impresión, merchandising, redes sociales, señalización.</a:t>
+            </a:r>
+            <a:endParaRPr lang="en-US" sz="1300" dirty="0"/>
+          </a:p>
+        </p:txBody>
+      </p:sp>
       <p:pic>
         <p:nvPicPr>
-          <p:cNvPr id="4" name="Image 0" descr="preencoded.png">    </p:cNvPr>
+          <p:cNvPr id="13" name="Image 0" descr="preencoded.png">    </p:cNvPr>
           <p:cNvPicPr>
             <a:picLocks noChangeAspect="1"/>
           </p:cNvPicPr>
@@ -3058,8 +5442,8 @@
         </p:blipFill>
         <p:spPr>
           <a:xfrm>
-            <a:off x="7772400" y="1097280"/>
-            <a:ext cx="3657600" cy="2286000"/>
+            <a:off x="7680960" y="1005840"/>
+            <a:ext cx="3840480" cy="2560320"/>
           </a:xfrm>
           <a:prstGeom prst="rect">
             <a:avLst/>
@@ -3176,9 +5560,173 @@
           </a:p>
         </p:txBody>
       </p:sp>
+      <p:sp>
+        <p:nvSpPr>
+          <p:cNvPr id="4" name="Text 2"/>
+          <p:cNvSpPr/>
+          <p:nvPr/>
+        </p:nvSpPr>
+        <p:spPr>
+          <a:xfrm>
+            <a:off x="457200" y="868680"/>
+            <a:ext cx="6949440" cy="502920"/>
+          </a:xfrm>
+          <a:prstGeom prst="rect">
+            <a:avLst/>
+          </a:prstGeom>
+          <a:noFill/>
+          <a:ln/>
+        </p:spPr>
+        <p:txBody>
+          <a:bodyPr wrap="square" rtlCol="0" anchor="t">
+            <a:normAutofit/>
+          </a:bodyPr>
+          <a:lstStyle/>
+          <a:p>
+            <a:pPr indent="0" marL="0">
+              <a:buNone/>
+            </a:pPr>
+            <a:r>
+              <a:rPr lang="en-US" sz="2200" b="1" dirty="0">
+                <a:solidFill>
+                  <a:srgbClr val="1A1A1A"/>
+                </a:solidFill>
+                <a:latin typeface="Arial" pitchFamily="34" charset="0"/>
+                <a:ea typeface="Arial" pitchFamily="34" charset="-122"/>
+                <a:cs typeface="Arial" pitchFamily="34" charset="-120"/>
+              </a:rPr>
+              <a:t>Trabajos seleccionados</a:t>
+            </a:r>
+            <a:endParaRPr lang="en-US" sz="2200" dirty="0"/>
+          </a:p>
+        </p:txBody>
+      </p:sp>
+      <p:sp>
+        <p:nvSpPr>
+          <p:cNvPr id="5" name="Text 3"/>
+          <p:cNvSpPr/>
+          <p:nvPr/>
+        </p:nvSpPr>
+        <p:spPr>
+          <a:xfrm>
+            <a:off x="457200" y="1481328"/>
+            <a:ext cx="6949440" cy="502920"/>
+          </a:xfrm>
+          <a:prstGeom prst="rect">
+            <a:avLst/>
+          </a:prstGeom>
+          <a:noFill/>
+          <a:ln/>
+        </p:spPr>
+        <p:txBody>
+          <a:bodyPr wrap="square" rtlCol="0" anchor="t">
+            <a:normAutofit/>
+          </a:bodyPr>
+          <a:lstStyle/>
+          <a:p>
+            <a:pPr indent="0" marL="0">
+              <a:buNone/>
+            </a:pPr>
+            <a:r>
+              <a:rPr lang="en-US" sz="2200" b="1" dirty="0">
+                <a:solidFill>
+                  <a:srgbClr val="1A1A1A"/>
+                </a:solidFill>
+                <a:latin typeface="Arial" pitchFamily="34" charset="0"/>
+                <a:ea typeface="Arial" pitchFamily="34" charset="-122"/>
+                <a:cs typeface="Arial" pitchFamily="34" charset="-120"/>
+              </a:rPr>
+              <a:t>Algunas de las marcas que hemos creado.</a:t>
+            </a:r>
+            <a:endParaRPr lang="en-US" sz="2200" dirty="0"/>
+          </a:p>
+        </p:txBody>
+      </p:sp>
+      <p:sp>
+        <p:nvSpPr>
+          <p:cNvPr id="6" name="Text 4"/>
+          <p:cNvSpPr/>
+          <p:nvPr/>
+        </p:nvSpPr>
+        <p:spPr>
+          <a:xfrm>
+            <a:off x="457200" y="2093976"/>
+            <a:ext cx="6949440" cy="502920"/>
+          </a:xfrm>
+          <a:prstGeom prst="rect">
+            <a:avLst/>
+          </a:prstGeom>
+          <a:noFill/>
+          <a:ln/>
+        </p:spPr>
+        <p:txBody>
+          <a:bodyPr wrap="square" rtlCol="0" anchor="t">
+            <a:normAutofit/>
+          </a:bodyPr>
+          <a:lstStyle/>
+          <a:p>
+            <a:pPr indent="0" marL="0">
+              <a:buNone/>
+            </a:pPr>
+            <a:r>
+              <a:rPr lang="en-US" sz="1600" b="1" dirty="0">
+                <a:solidFill>
+                  <a:srgbClr val="1A1A1A"/>
+                </a:solidFill>
+                <a:latin typeface="Arial" pitchFamily="34" charset="0"/>
+                <a:ea typeface="Arial" pitchFamily="34" charset="-122"/>
+                <a:cs typeface="Arial" pitchFamily="34" charset="-120"/>
+              </a:rPr>
+              <a:t>Logotipos entregados</a:t>
+            </a:r>
+            <a:endParaRPr lang="en-US" sz="1600" dirty="0"/>
+          </a:p>
+        </p:txBody>
+      </p:sp>
+      <p:sp>
+        <p:nvSpPr>
+          <p:cNvPr id="7" name="Text 5"/>
+          <p:cNvSpPr/>
+          <p:nvPr/>
+        </p:nvSpPr>
+        <p:spPr>
+          <a:xfrm>
+            <a:off x="457200" y="2706624"/>
+            <a:ext cx="6949440" cy="502920"/>
+          </a:xfrm>
+          <a:prstGeom prst="rect">
+            <a:avLst/>
+          </a:prstGeom>
+          <a:noFill/>
+          <a:ln/>
+        </p:spPr>
+        <p:txBody>
+          <a:bodyPr wrap="square" rtlCol="0" anchor="t">
+            <a:normAutofit/>
+          </a:bodyPr>
+          <a:lstStyle/>
+          <a:p>
+            <a:pPr indent="0" marL="0">
+              <a:buNone/>
+            </a:pPr>
+            <a:r>
+              <a:rPr lang="en-US" sz="1600" b="1" dirty="0">
+                <a:solidFill>
+                  <a:srgbClr val="1A1A1A"/>
+                </a:solidFill>
+                <a:latin typeface="Arial" pitchFamily="34" charset="0"/>
+                <a:ea typeface="Arial" pitchFamily="34" charset="-122"/>
+                <a:cs typeface="Arial" pitchFamily="34" charset="-120"/>
+              </a:rPr>
+              <a:t>Verticales</a:t>
+            </a:r>
+            <a:endParaRPr lang="en-US" sz="1600" dirty="0"/>
+          </a:p>
+        </p:txBody>
+      </p:sp>
       <p:pic>
         <p:nvPicPr>
-          <p:cNvPr id="4" name="Image 0" descr="preencoded.png">    </p:cNvPr>
+          <p:cNvPr id="8" name="Image 0" descr="preencoded.png">    </p:cNvPr>
           <p:cNvPicPr>
             <a:picLocks noChangeAspect="1"/>
           </p:cNvPicPr>
@@ -3192,8 +5740,200 @@
         </p:blipFill>
         <p:spPr>
           <a:xfrm>
-            <a:off x="7772400" y="1097280"/>
-            <a:ext cx="3657600" cy="2286000"/>
+            <a:off x="7498080" y="914400"/>
+            <a:ext cx="3474720" cy="1463040"/>
+          </a:xfrm>
+          <a:prstGeom prst="rect">
+            <a:avLst/>
+          </a:prstGeom>
+        </p:spPr>
+      </p:pic>
+      <p:pic>
+        <p:nvPicPr>
+          <p:cNvPr id="9" name="Image 1" descr="preencoded.png">    </p:cNvPr>
+          <p:cNvPicPr>
+            <a:picLocks noChangeAspect="1"/>
+          </p:cNvPicPr>
+          <p:nvPr/>
+        </p:nvPicPr>
+        <p:blipFill>
+          <a:blip r:embed="rId2"/>
+          <a:stretch>
+            <a:fillRect/>
+          </a:stretch>
+        </p:blipFill>
+        <p:spPr>
+          <a:xfrm>
+            <a:off x="11109960" y="914400"/>
+            <a:ext cx="3474720" cy="1463040"/>
+          </a:xfrm>
+          <a:prstGeom prst="rect">
+            <a:avLst/>
+          </a:prstGeom>
+        </p:spPr>
+      </p:pic>
+      <p:pic>
+        <p:nvPicPr>
+          <p:cNvPr id="10" name="Image 2" descr="preencoded.png">    </p:cNvPr>
+          <p:cNvPicPr>
+            <a:picLocks noChangeAspect="1"/>
+          </p:cNvPicPr>
+          <p:nvPr/>
+        </p:nvPicPr>
+        <p:blipFill>
+          <a:blip r:embed="rId3"/>
+          <a:stretch>
+            <a:fillRect/>
+          </a:stretch>
+        </p:blipFill>
+        <p:spPr>
+          <a:xfrm>
+            <a:off x="14721840" y="914400"/>
+            <a:ext cx="3474720" cy="1463040"/>
+          </a:xfrm>
+          <a:prstGeom prst="rect">
+            <a:avLst/>
+          </a:prstGeom>
+        </p:spPr>
+      </p:pic>
+      <p:pic>
+        <p:nvPicPr>
+          <p:cNvPr id="11" name="Image 3" descr="preencoded.png">    </p:cNvPr>
+          <p:cNvPicPr>
+            <a:picLocks noChangeAspect="1"/>
+          </p:cNvPicPr>
+          <p:nvPr/>
+        </p:nvPicPr>
+        <p:blipFill>
+          <a:blip r:embed="rId4"/>
+          <a:stretch>
+            <a:fillRect/>
+          </a:stretch>
+        </p:blipFill>
+        <p:spPr>
+          <a:xfrm>
+            <a:off x="7498080" y="2514600"/>
+            <a:ext cx="3474720" cy="1463040"/>
+          </a:xfrm>
+          <a:prstGeom prst="rect">
+            <a:avLst/>
+          </a:prstGeom>
+        </p:spPr>
+      </p:pic>
+      <p:pic>
+        <p:nvPicPr>
+          <p:cNvPr id="12" name="Image 4" descr="preencoded.png">    </p:cNvPr>
+          <p:cNvPicPr>
+            <a:picLocks noChangeAspect="1"/>
+          </p:cNvPicPr>
+          <p:nvPr/>
+        </p:nvPicPr>
+        <p:blipFill>
+          <a:blip r:embed="rId5"/>
+          <a:stretch>
+            <a:fillRect/>
+          </a:stretch>
+        </p:blipFill>
+        <p:spPr>
+          <a:xfrm>
+            <a:off x="11109960" y="2514600"/>
+            <a:ext cx="3474720" cy="1463040"/>
+          </a:xfrm>
+          <a:prstGeom prst="rect">
+            <a:avLst/>
+          </a:prstGeom>
+        </p:spPr>
+      </p:pic>
+      <p:pic>
+        <p:nvPicPr>
+          <p:cNvPr id="13" name="Image 5" descr="preencoded.png">    </p:cNvPr>
+          <p:cNvPicPr>
+            <a:picLocks noChangeAspect="1"/>
+          </p:cNvPicPr>
+          <p:nvPr/>
+        </p:nvPicPr>
+        <p:blipFill>
+          <a:blip r:embed="rId6"/>
+          <a:stretch>
+            <a:fillRect/>
+          </a:stretch>
+        </p:blipFill>
+        <p:spPr>
+          <a:xfrm>
+            <a:off x="14721840" y="2514600"/>
+            <a:ext cx="3474720" cy="1463040"/>
+          </a:xfrm>
+          <a:prstGeom prst="rect">
+            <a:avLst/>
+          </a:prstGeom>
+        </p:spPr>
+      </p:pic>
+      <p:pic>
+        <p:nvPicPr>
+          <p:cNvPr id="14" name="Image 6" descr="preencoded.png">    </p:cNvPr>
+          <p:cNvPicPr>
+            <a:picLocks noChangeAspect="1"/>
+          </p:cNvPicPr>
+          <p:nvPr/>
+        </p:nvPicPr>
+        <p:blipFill>
+          <a:blip r:embed="rId7"/>
+          <a:stretch>
+            <a:fillRect/>
+          </a:stretch>
+        </p:blipFill>
+        <p:spPr>
+          <a:xfrm>
+            <a:off x="7498080" y="4114800"/>
+            <a:ext cx="3474720" cy="1463040"/>
+          </a:xfrm>
+          <a:prstGeom prst="rect">
+            <a:avLst/>
+          </a:prstGeom>
+        </p:spPr>
+      </p:pic>
+      <p:pic>
+        <p:nvPicPr>
+          <p:cNvPr id="15" name="Image 7" descr="preencoded.png">    </p:cNvPr>
+          <p:cNvPicPr>
+            <a:picLocks noChangeAspect="1"/>
+          </p:cNvPicPr>
+          <p:nvPr/>
+        </p:nvPicPr>
+        <p:blipFill>
+          <a:blip r:embed="rId8"/>
+          <a:stretch>
+            <a:fillRect/>
+          </a:stretch>
+        </p:blipFill>
+        <p:spPr>
+          <a:xfrm>
+            <a:off x="11109960" y="4114800"/>
+            <a:ext cx="3474720" cy="1463040"/>
+          </a:xfrm>
+          <a:prstGeom prst="rect">
+            <a:avLst/>
+          </a:prstGeom>
+        </p:spPr>
+      </p:pic>
+      <p:pic>
+        <p:nvPicPr>
+          <p:cNvPr id="16" name="Image 8" descr="preencoded.png">    </p:cNvPr>
+          <p:cNvPicPr>
+            <a:picLocks noChangeAspect="1"/>
+          </p:cNvPicPr>
+          <p:nvPr/>
+        </p:nvPicPr>
+        <p:blipFill>
+          <a:blip r:embed="rId9"/>
+          <a:stretch>
+            <a:fillRect/>
+          </a:stretch>
+        </p:blipFill>
+        <p:spPr>
+          <a:xfrm>
+            <a:off x="14721840" y="4114800"/>
+            <a:ext cx="3474720" cy="1463040"/>
           </a:xfrm>
           <a:prstGeom prst="rect">
             <a:avLst/>
@@ -3310,9 +6050,378 @@
           </a:p>
         </p:txBody>
       </p:sp>
+      <p:sp>
+        <p:nvSpPr>
+          <p:cNvPr id="4" name="Text 2"/>
+          <p:cNvSpPr/>
+          <p:nvPr/>
+        </p:nvSpPr>
+        <p:spPr>
+          <a:xfrm>
+            <a:off x="457200" y="868680"/>
+            <a:ext cx="6949440" cy="502920"/>
+          </a:xfrm>
+          <a:prstGeom prst="rect">
+            <a:avLst/>
+          </a:prstGeom>
+          <a:noFill/>
+          <a:ln/>
+        </p:spPr>
+        <p:txBody>
+          <a:bodyPr wrap="square" rtlCol="0" anchor="t">
+            <a:normAutofit/>
+          </a:bodyPr>
+          <a:lstStyle/>
+          <a:p>
+            <a:pPr indent="0" marL="0">
+              <a:buNone/>
+            </a:pPr>
+            <a:r>
+              <a:rPr lang="en-US" sz="2200" b="1" dirty="0">
+                <a:solidFill>
+                  <a:srgbClr val="1A1A1A"/>
+                </a:solidFill>
+                <a:latin typeface="Arial" pitchFamily="34" charset="0"/>
+                <a:ea typeface="Arial" pitchFamily="34" charset="-122"/>
+                <a:cs typeface="Arial" pitchFamily="34" charset="-120"/>
+              </a:rPr>
+              <a:t>El proceso creativo</a:t>
+            </a:r>
+            <a:endParaRPr lang="en-US" sz="2200" dirty="0"/>
+          </a:p>
+        </p:txBody>
+      </p:sp>
+      <p:sp>
+        <p:nvSpPr>
+          <p:cNvPr id="5" name="Text 3"/>
+          <p:cNvSpPr/>
+          <p:nvPr/>
+        </p:nvSpPr>
+        <p:spPr>
+          <a:xfrm>
+            <a:off x="457200" y="1481328"/>
+            <a:ext cx="6949440" cy="502920"/>
+          </a:xfrm>
+          <a:prstGeom prst="rect">
+            <a:avLst/>
+          </a:prstGeom>
+          <a:noFill/>
+          <a:ln/>
+        </p:spPr>
+        <p:txBody>
+          <a:bodyPr wrap="square" rtlCol="0" anchor="t">
+            <a:normAutofit/>
+          </a:bodyPr>
+          <a:lstStyle/>
+          <a:p>
+            <a:pPr indent="0" marL="0">
+              <a:buNone/>
+            </a:pPr>
+            <a:r>
+              <a:rPr lang="en-US" sz="2200" b="1" dirty="0">
+                <a:solidFill>
+                  <a:srgbClr val="1A1A1A"/>
+                </a:solidFill>
+                <a:latin typeface="Arial" pitchFamily="34" charset="0"/>
+                <a:ea typeface="Arial" pitchFamily="34" charset="-122"/>
+                <a:cs typeface="Arial" pitchFamily="34" charset="-120"/>
+              </a:rPr>
+              <a:t>Del brief a los archivos finales.</a:t>
+            </a:r>
+            <a:endParaRPr lang="en-US" sz="2200" dirty="0"/>
+          </a:p>
+        </p:txBody>
+      </p:sp>
+      <p:sp>
+        <p:nvSpPr>
+          <p:cNvPr id="6" name="Text 4"/>
+          <p:cNvSpPr/>
+          <p:nvPr/>
+        </p:nvSpPr>
+        <p:spPr>
+          <a:xfrm>
+            <a:off x="457200" y="2093976"/>
+            <a:ext cx="6949440" cy="502920"/>
+          </a:xfrm>
+          <a:prstGeom prst="rect">
+            <a:avLst/>
+          </a:prstGeom>
+          <a:noFill/>
+          <a:ln/>
+        </p:spPr>
+        <p:txBody>
+          <a:bodyPr wrap="square" rtlCol="0" anchor="t">
+            <a:normAutofit/>
+          </a:bodyPr>
+          <a:lstStyle/>
+          <a:p>
+            <a:pPr indent="0" marL="0">
+              <a:buNone/>
+            </a:pPr>
+            <a:r>
+              <a:rPr lang="en-US" sz="1600" b="1" dirty="0">
+                <a:solidFill>
+                  <a:srgbClr val="1A1A1A"/>
+                </a:solidFill>
+                <a:latin typeface="Arial" pitchFamily="34" charset="0"/>
+                <a:ea typeface="Arial" pitchFamily="34" charset="-122"/>
+                <a:cs typeface="Arial" pitchFamily="34" charset="-120"/>
+              </a:rPr>
+              <a:t>Compra y bienvenida</a:t>
+            </a:r>
+            <a:endParaRPr lang="en-US" sz="1600" dirty="0"/>
+          </a:p>
+        </p:txBody>
+      </p:sp>
+      <p:sp>
+        <p:nvSpPr>
+          <p:cNvPr id="7" name="Text 5"/>
+          <p:cNvSpPr/>
+          <p:nvPr/>
+        </p:nvSpPr>
+        <p:spPr>
+          <a:xfrm>
+            <a:off x="457200" y="2706624"/>
+            <a:ext cx="6949440" cy="502920"/>
+          </a:xfrm>
+          <a:prstGeom prst="rect">
+            <a:avLst/>
+          </a:prstGeom>
+          <a:noFill/>
+          <a:ln/>
+        </p:spPr>
+        <p:txBody>
+          <a:bodyPr wrap="square" rtlCol="0" anchor="t">
+            <a:normAutofit/>
+          </a:bodyPr>
+          <a:lstStyle/>
+          <a:p>
+            <a:pPr indent="0" marL="0">
+              <a:buNone/>
+            </a:pPr>
+            <a:r>
+              <a:rPr lang="en-US" sz="1300" dirty="0">
+                <a:solidFill>
+                  <a:srgbClr val="4A4A4A"/>
+                </a:solidFill>
+                <a:latin typeface="Arial" pitchFamily="34" charset="0"/>
+                <a:ea typeface="Arial" pitchFamily="34" charset="-122"/>
+                <a:cs typeface="Arial" pitchFamily="34" charset="-120"/>
+              </a:rPr>
+              <a:t>El cliente compra un plan y recibe un correo de bienvenida confirmando la orden.</a:t>
+            </a:r>
+            <a:endParaRPr lang="en-US" sz="1300" dirty="0"/>
+          </a:p>
+        </p:txBody>
+      </p:sp>
+      <p:sp>
+        <p:nvSpPr>
+          <p:cNvPr id="8" name="Text 6"/>
+          <p:cNvSpPr/>
+          <p:nvPr/>
+        </p:nvSpPr>
+        <p:spPr>
+          <a:xfrm>
+            <a:off x="457200" y="3346704"/>
+            <a:ext cx="6949440" cy="502920"/>
+          </a:xfrm>
+          <a:prstGeom prst="rect">
+            <a:avLst/>
+          </a:prstGeom>
+          <a:noFill/>
+          <a:ln/>
+        </p:spPr>
+        <p:txBody>
+          <a:bodyPr wrap="square" rtlCol="0" anchor="t">
+            <a:normAutofit/>
+          </a:bodyPr>
+          <a:lstStyle/>
+          <a:p>
+            <a:pPr indent="0" marL="0">
+              <a:buNone/>
+            </a:pPr>
+            <a:r>
+              <a:rPr lang="en-US" sz="1600" b="1" dirty="0">
+                <a:solidFill>
+                  <a:srgbClr val="1A1A1A"/>
+                </a:solidFill>
+                <a:latin typeface="Arial" pitchFamily="34" charset="0"/>
+                <a:ea typeface="Arial" pitchFamily="34" charset="-122"/>
+                <a:cs typeface="Arial" pitchFamily="34" charset="-120"/>
+              </a:rPr>
+              <a:t>Contacto del coordinador</a:t>
+            </a:r>
+            <a:endParaRPr lang="en-US" sz="1600" dirty="0"/>
+          </a:p>
+        </p:txBody>
+      </p:sp>
+      <p:sp>
+        <p:nvSpPr>
+          <p:cNvPr id="9" name="Text 7"/>
+          <p:cNvSpPr/>
+          <p:nvPr/>
+        </p:nvSpPr>
+        <p:spPr>
+          <a:xfrm>
+            <a:off x="457200" y="3959352"/>
+            <a:ext cx="6949440" cy="502920"/>
+          </a:xfrm>
+          <a:prstGeom prst="rect">
+            <a:avLst/>
+          </a:prstGeom>
+          <a:noFill/>
+          <a:ln/>
+        </p:spPr>
+        <p:txBody>
+          <a:bodyPr wrap="square" rtlCol="0" anchor="t">
+            <a:normAutofit/>
+          </a:bodyPr>
+          <a:lstStyle/>
+          <a:p>
+            <a:pPr indent="0" marL="0">
+              <a:buNone/>
+            </a:pPr>
+            <a:r>
+              <a:rPr lang="en-US" sz="1300" dirty="0">
+                <a:solidFill>
+                  <a:srgbClr val="4A4A4A"/>
+                </a:solidFill>
+                <a:latin typeface="Arial" pitchFamily="34" charset="0"/>
+                <a:ea typeface="Arial" pitchFamily="34" charset="-122"/>
+                <a:cs typeface="Arial" pitchFamily="34" charset="-120"/>
+              </a:rPr>
+              <a:t>Un Coordinador de Diseño de Logotipo dedicado recoge el brief creativo — objetivos, estilo, colores, referencias.</a:t>
+            </a:r>
+            <a:endParaRPr lang="en-US" sz="1300" dirty="0"/>
+          </a:p>
+        </p:txBody>
+      </p:sp>
+      <p:sp>
+        <p:nvSpPr>
+          <p:cNvPr id="10" name="Text 8"/>
+          <p:cNvSpPr/>
+          <p:nvPr/>
+        </p:nvSpPr>
+        <p:spPr>
+          <a:xfrm>
+            <a:off x="457200" y="4599432"/>
+            <a:ext cx="6949440" cy="502920"/>
+          </a:xfrm>
+          <a:prstGeom prst="rect">
+            <a:avLst/>
+          </a:prstGeom>
+          <a:noFill/>
+          <a:ln/>
+        </p:spPr>
+        <p:txBody>
+          <a:bodyPr wrap="square" rtlCol="0" anchor="t">
+            <a:normAutofit/>
+          </a:bodyPr>
+          <a:lstStyle/>
+          <a:p>
+            <a:pPr indent="0" marL="0">
+              <a:buNone/>
+            </a:pPr>
+            <a:r>
+              <a:rPr lang="en-US" sz="1600" b="1" dirty="0">
+                <a:solidFill>
+                  <a:srgbClr val="1A1A1A"/>
+                </a:solidFill>
+                <a:latin typeface="Arial" pitchFamily="34" charset="0"/>
+                <a:ea typeface="Arial" pitchFamily="34" charset="-122"/>
+                <a:cs typeface="Arial" pitchFamily="34" charset="-120"/>
+              </a:rPr>
+              <a:t>Conceptos iniciales</a:t>
+            </a:r>
+            <a:endParaRPr lang="en-US" sz="1600" dirty="0"/>
+          </a:p>
+        </p:txBody>
+      </p:sp>
+      <p:sp>
+        <p:nvSpPr>
+          <p:cNvPr id="11" name="Text 9"/>
+          <p:cNvSpPr/>
+          <p:nvPr/>
+        </p:nvSpPr>
+        <p:spPr>
+          <a:xfrm>
+            <a:off x="457200" y="5212080"/>
+            <a:ext cx="6949440" cy="502920"/>
+          </a:xfrm>
+          <a:prstGeom prst="rect">
+            <a:avLst/>
+          </a:prstGeom>
+          <a:noFill/>
+          <a:ln/>
+        </p:spPr>
+        <p:txBody>
+          <a:bodyPr wrap="square" rtlCol="0" anchor="t">
+            <a:normAutofit/>
+          </a:bodyPr>
+          <a:lstStyle/>
+          <a:p>
+            <a:pPr indent="0" marL="0">
+              <a:buNone/>
+            </a:pPr>
+            <a:r>
+              <a:rPr lang="en-US" sz="1300" dirty="0">
+                <a:solidFill>
+                  <a:srgbClr val="4A4A4A"/>
+                </a:solidFill>
+                <a:latin typeface="Arial" pitchFamily="34" charset="0"/>
+                <a:ea typeface="Arial" pitchFamily="34" charset="-122"/>
+                <a:cs typeface="Arial" pitchFamily="34" charset="-120"/>
+              </a:rPr>
+              <a:t>Los diseñadores internos entregan hasta diez conceptos personalizados basados en el brief.</a:t>
+            </a:r>
+            <a:endParaRPr lang="en-US" sz="1300" dirty="0"/>
+          </a:p>
+        </p:txBody>
+      </p:sp>
+      <p:sp>
+        <p:nvSpPr>
+          <p:cNvPr id="12" name="Text 10"/>
+          <p:cNvSpPr/>
+          <p:nvPr/>
+        </p:nvSpPr>
+        <p:spPr>
+          <a:xfrm>
+            <a:off x="457200" y="5852160"/>
+            <a:ext cx="6949440" cy="502920"/>
+          </a:xfrm>
+          <a:prstGeom prst="rect">
+            <a:avLst/>
+          </a:prstGeom>
+          <a:noFill/>
+          <a:ln/>
+        </p:spPr>
+        <p:txBody>
+          <a:bodyPr wrap="square" rtlCol="0" anchor="t">
+            <a:normAutofit/>
+          </a:bodyPr>
+          <a:lstStyle/>
+          <a:p>
+            <a:pPr indent="0" marL="0">
+              <a:buNone/>
+            </a:pPr>
+            <a:r>
+              <a:rPr lang="en-US" sz="1600" b="1" dirty="0">
+                <a:solidFill>
+                  <a:srgbClr val="1A1A1A"/>
+                </a:solidFill>
+                <a:latin typeface="Arial" pitchFamily="34" charset="0"/>
+                <a:ea typeface="Arial" pitchFamily="34" charset="-122"/>
+                <a:cs typeface="Arial" pitchFamily="34" charset="-120"/>
+              </a:rPr>
+              <a:t>Revisiones</a:t>
+            </a:r>
+            <a:endParaRPr lang="en-US" sz="1600" dirty="0"/>
+          </a:p>
+        </p:txBody>
+      </p:sp>
       <p:pic>
         <p:nvPicPr>
-          <p:cNvPr id="4" name="Image 0" descr="preencoded.png">    </p:cNvPr>
+          <p:cNvPr id="13" name="Image 0" descr="preencoded.png">    </p:cNvPr>
           <p:cNvPicPr>
             <a:picLocks noChangeAspect="1"/>
           </p:cNvPicPr>
@@ -3326,8 +6435,8 @@
         </p:blipFill>
         <p:spPr>
           <a:xfrm>
-            <a:off x="7772400" y="1097280"/>
-            <a:ext cx="3657600" cy="2286000"/>
+            <a:off x="7680960" y="1005840"/>
+            <a:ext cx="3840480" cy="2560320"/>
           </a:xfrm>
           <a:prstGeom prst="rect">
             <a:avLst/>
@@ -3444,6 +6553,357 @@
           </a:p>
         </p:txBody>
       </p:sp>
+      <p:sp>
+        <p:nvSpPr>
+          <p:cNvPr id="4" name="Text 2"/>
+          <p:cNvSpPr/>
+          <p:nvPr/>
+        </p:nvSpPr>
+        <p:spPr>
+          <a:xfrm>
+            <a:off x="457200" y="868680"/>
+            <a:ext cx="10972800" cy="502920"/>
+          </a:xfrm>
+          <a:prstGeom prst="rect">
+            <a:avLst/>
+          </a:prstGeom>
+          <a:noFill/>
+          <a:ln/>
+        </p:spPr>
+        <p:txBody>
+          <a:bodyPr wrap="square" rtlCol="0" anchor="t">
+            <a:normAutofit/>
+          </a:bodyPr>
+          <a:lstStyle/>
+          <a:p>
+            <a:pPr indent="0" marL="0">
+              <a:buNone/>
+            </a:pPr>
+            <a:r>
+              <a:rPr lang="en-US" sz="2200" b="1" dirty="0">
+                <a:solidFill>
+                  <a:srgbClr val="1A1A1A"/>
+                </a:solidFill>
+                <a:latin typeface="Arial" pitchFamily="34" charset="0"/>
+                <a:ea typeface="Arial" pitchFamily="34" charset="-122"/>
+                <a:cs typeface="Arial" pitchFamily="34" charset="-120"/>
+              </a:rPr>
+              <a:t>Planes y precios</a:t>
+            </a:r>
+            <a:endParaRPr lang="en-US" sz="2200" dirty="0"/>
+          </a:p>
+        </p:txBody>
+      </p:sp>
+      <p:sp>
+        <p:nvSpPr>
+          <p:cNvPr id="5" name="Text 3"/>
+          <p:cNvSpPr/>
+          <p:nvPr/>
+        </p:nvSpPr>
+        <p:spPr>
+          <a:xfrm>
+            <a:off x="457200" y="1481328"/>
+            <a:ext cx="10972800" cy="502920"/>
+          </a:xfrm>
+          <a:prstGeom prst="rect">
+            <a:avLst/>
+          </a:prstGeom>
+          <a:noFill/>
+          <a:ln/>
+        </p:spPr>
+        <p:txBody>
+          <a:bodyPr wrap="square" rtlCol="0" anchor="t">
+            <a:normAutofit/>
+          </a:bodyPr>
+          <a:lstStyle/>
+          <a:p>
+            <a:pPr indent="0" marL="0">
+              <a:buNone/>
+            </a:pPr>
+            <a:r>
+              <a:rPr lang="en-US" sz="2200" b="1" dirty="0">
+                <a:solidFill>
+                  <a:srgbClr val="1A1A1A"/>
+                </a:solidFill>
+                <a:latin typeface="Arial" pitchFamily="34" charset="0"/>
+                <a:ea typeface="Arial" pitchFamily="34" charset="-122"/>
+                <a:cs typeface="Arial" pitchFamily="34" charset="-120"/>
+              </a:rPr>
+              <a:t>Tres niveles para cada presupuesto.</a:t>
+            </a:r>
+            <a:endParaRPr lang="en-US" sz="2200" dirty="0"/>
+          </a:p>
+        </p:txBody>
+      </p:sp>
+      <p:sp>
+        <p:nvSpPr>
+          <p:cNvPr id="6" name="Text 4"/>
+          <p:cNvSpPr/>
+          <p:nvPr/>
+        </p:nvSpPr>
+        <p:spPr>
+          <a:xfrm>
+            <a:off x="457200" y="2093976"/>
+            <a:ext cx="10972800" cy="502920"/>
+          </a:xfrm>
+          <a:prstGeom prst="rect">
+            <a:avLst/>
+          </a:prstGeom>
+          <a:noFill/>
+          <a:ln/>
+        </p:spPr>
+        <p:txBody>
+          <a:bodyPr wrap="square" rtlCol="0" anchor="t">
+            <a:normAutofit/>
+          </a:bodyPr>
+          <a:lstStyle/>
+          <a:p>
+            <a:pPr indent="0" marL="0">
+              <a:buNone/>
+            </a:pPr>
+            <a:r>
+              <a:rPr lang="en-US" sz="1300" dirty="0">
+                <a:solidFill>
+                  <a:srgbClr val="4A4A4A"/>
+                </a:solidFill>
+                <a:latin typeface="Arial" pitchFamily="34" charset="0"/>
+                <a:ea typeface="Arial" pitchFamily="34" charset="-122"/>
+                <a:cs typeface="Arial" pitchFamily="34" charset="-120"/>
+              </a:rPr>
+              <a:t>Todos los planes incluyen el Coordinador de Diseño de Logotipo, tres rondas de revisiones, el paquete de 11 formatos y la propiedad total del diseño final.</a:t>
+            </a:r>
+            <a:endParaRPr lang="en-US" sz="1300" dirty="0"/>
+          </a:p>
+        </p:txBody>
+      </p:sp>
+      <p:sp>
+        <p:nvSpPr>
+          <p:cNvPr id="7" name="Text 5"/>
+          <p:cNvSpPr/>
+          <p:nvPr/>
+        </p:nvSpPr>
+        <p:spPr>
+          <a:xfrm>
+            <a:off x="594360" y="2734056"/>
+            <a:ext cx="10789920" cy="1783080"/>
+          </a:xfrm>
+          <a:prstGeom prst="rect">
+            <a:avLst/>
+          </a:prstGeom>
+          <a:noFill/>
+          <a:ln/>
+        </p:spPr>
+        <p:txBody>
+          <a:bodyPr wrap="square" rtlCol="0" anchor="t">
+            <a:normAutofit/>
+          </a:bodyPr>
+          <a:lstStyle/>
+          <a:p>
+            <a:pPr marL="342900" indent="-342900">
+              <a:buSzPct val="100000"/>
+              <a:buChar char="•"/>
+            </a:pPr>
+            <a:r>
+              <a:rPr lang="en-US" sz="1200" dirty="0">
+                <a:solidFill>
+                  <a:srgbClr val="4A4A4A"/>
+                </a:solidFill>
+                <a:latin typeface="Arial" pitchFamily="34" charset="0"/>
+                <a:ea typeface="Arial" pitchFamily="34" charset="-122"/>
+                <a:cs typeface="Arial" pitchFamily="34" charset="-120"/>
+              </a:rPr>
+              <a:t>Coordinador de Diseño de Logotipo</a:t>
+            </a:r>
+            <a:endParaRPr lang="en-US" sz="1200" dirty="0"/>
+          </a:p>
+          <a:p>
+            <a:pPr marL="342900" indent="-342900">
+              <a:buSzPct val="100000"/>
+              <a:buChar char="•"/>
+            </a:pPr>
+            <a:r>
+              <a:rPr lang="en-US" sz="1200" dirty="0">
+                <a:solidFill>
+                  <a:srgbClr val="4A4A4A"/>
+                </a:solidFill>
+                <a:latin typeface="Arial" pitchFamily="34" charset="0"/>
+                <a:ea typeface="Arial" pitchFamily="34" charset="-122"/>
+                <a:cs typeface="Arial" pitchFamily="34" charset="-120"/>
+              </a:rPr>
+              <a:t>4 conceptos de diseño personalizados</a:t>
+            </a:r>
+            <a:endParaRPr lang="en-US" sz="1200" dirty="0"/>
+          </a:p>
+          <a:p>
+            <a:pPr marL="342900" indent="-342900">
+              <a:buSzPct val="100000"/>
+              <a:buChar char="•"/>
+            </a:pPr>
+            <a:r>
+              <a:rPr lang="en-US" sz="1200" dirty="0">
+                <a:solidFill>
+                  <a:srgbClr val="4A4A4A"/>
+                </a:solidFill>
+                <a:latin typeface="Arial" pitchFamily="34" charset="0"/>
+                <a:ea typeface="Arial" pitchFamily="34" charset="-122"/>
+                <a:cs typeface="Arial" pitchFamily="34" charset="-120"/>
+              </a:rPr>
+              <a:t>3 rondas de revisiones</a:t>
+            </a:r>
+            <a:endParaRPr lang="en-US" sz="1200" dirty="0"/>
+          </a:p>
+          <a:p>
+            <a:pPr marL="342900" indent="-342900">
+              <a:buSzPct val="100000"/>
+              <a:buChar char="•"/>
+            </a:pPr>
+            <a:r>
+              <a:rPr lang="en-US" sz="1200" dirty="0">
+                <a:solidFill>
+                  <a:srgbClr val="4A4A4A"/>
+                </a:solidFill>
+                <a:latin typeface="Arial" pitchFamily="34" charset="0"/>
+                <a:ea typeface="Arial" pitchFamily="34" charset="-122"/>
+                <a:cs typeface="Arial" pitchFamily="34" charset="-120"/>
+              </a:rPr>
+              <a:t>11 formatos de archivo finales</a:t>
+            </a:r>
+            <a:endParaRPr lang="en-US" sz="1200" dirty="0"/>
+          </a:p>
+          <a:p>
+            <a:pPr marL="342900" indent="-342900">
+              <a:buSzPct val="100000"/>
+              <a:buChar char="•"/>
+            </a:pPr>
+            <a:r>
+              <a:rPr lang="en-US" sz="1200" dirty="0">
+                <a:solidFill>
+                  <a:srgbClr val="4A4A4A"/>
+                </a:solidFill>
+                <a:latin typeface="Arial" pitchFamily="34" charset="0"/>
+                <a:ea typeface="Arial" pitchFamily="34" charset="-122"/>
+                <a:cs typeface="Arial" pitchFamily="34" charset="-120"/>
+              </a:rPr>
+              <a:t>Propiedad total del diseño</a:t>
+            </a:r>
+            <a:endParaRPr lang="en-US" sz="1200" dirty="0"/>
+          </a:p>
+        </p:txBody>
+      </p:sp>
+      <p:sp>
+        <p:nvSpPr>
+          <p:cNvPr id="8" name="Text 6"/>
+          <p:cNvSpPr/>
+          <p:nvPr/>
+        </p:nvSpPr>
+        <p:spPr>
+          <a:xfrm>
+            <a:off x="594360" y="4654296"/>
+            <a:ext cx="10789920" cy="1783080"/>
+          </a:xfrm>
+          <a:prstGeom prst="rect">
+            <a:avLst/>
+          </a:prstGeom>
+          <a:noFill/>
+          <a:ln/>
+        </p:spPr>
+        <p:txBody>
+          <a:bodyPr wrap="square" rtlCol="0" anchor="t">
+            <a:normAutofit/>
+          </a:bodyPr>
+          <a:lstStyle/>
+          <a:p>
+            <a:pPr marL="342900" indent="-342900">
+              <a:buSzPct val="100000"/>
+              <a:buChar char="•"/>
+            </a:pPr>
+            <a:r>
+              <a:rPr lang="en-US" sz="1200" dirty="0">
+                <a:solidFill>
+                  <a:srgbClr val="4A4A4A"/>
+                </a:solidFill>
+                <a:latin typeface="Arial" pitchFamily="34" charset="0"/>
+                <a:ea typeface="Arial" pitchFamily="34" charset="-122"/>
+                <a:cs typeface="Arial" pitchFamily="34" charset="-120"/>
+              </a:rPr>
+              <a:t>Todo lo de Bronce</a:t>
+            </a:r>
+            <a:endParaRPr lang="en-US" sz="1200" dirty="0"/>
+          </a:p>
+          <a:p>
+            <a:pPr marL="342900" indent="-342900">
+              <a:buSzPct val="100000"/>
+              <a:buChar char="•"/>
+            </a:pPr>
+            <a:r>
+              <a:rPr lang="en-US" sz="1200" dirty="0">
+                <a:solidFill>
+                  <a:srgbClr val="4A4A4A"/>
+                </a:solidFill>
+                <a:latin typeface="Arial" pitchFamily="34" charset="0"/>
+                <a:ea typeface="Arial" pitchFamily="34" charset="-122"/>
+                <a:cs typeface="Arial" pitchFamily="34" charset="-120"/>
+              </a:rPr>
+              <a:t>6 conceptos de diseño personalizados</a:t>
+            </a:r>
+            <a:endParaRPr lang="en-US" sz="1200" dirty="0"/>
+          </a:p>
+          <a:p>
+            <a:pPr marL="342900" indent="-342900">
+              <a:buSzPct val="100000"/>
+              <a:buChar char="•"/>
+            </a:pPr>
+            <a:r>
+              <a:rPr lang="en-US" sz="1200" dirty="0">
+                <a:solidFill>
+                  <a:srgbClr val="4A4A4A"/>
+                </a:solidFill>
+                <a:latin typeface="Arial" pitchFamily="34" charset="0"/>
+                <a:ea typeface="Arial" pitchFamily="34" charset="-122"/>
+                <a:cs typeface="Arial" pitchFamily="34" charset="-120"/>
+              </a:rPr>
+              <a:t>Diseño de tarjeta de presentación</a:t>
+            </a:r>
+            <a:endParaRPr lang="en-US" sz="1200" dirty="0"/>
+          </a:p>
+          <a:p>
+            <a:pPr marL="342900" indent="-342900">
+              <a:buSzPct val="100000"/>
+              <a:buChar char="•"/>
+            </a:pPr>
+            <a:r>
+              <a:rPr lang="en-US" sz="1200" dirty="0">
+                <a:solidFill>
+                  <a:srgbClr val="4A4A4A"/>
+                </a:solidFill>
+                <a:latin typeface="Arial" pitchFamily="34" charset="0"/>
+                <a:ea typeface="Arial" pitchFamily="34" charset="-122"/>
+                <a:cs typeface="Arial" pitchFamily="34" charset="-120"/>
+              </a:rPr>
+              <a:t>Membrete y sobre</a:t>
+            </a:r>
+            <a:endParaRPr lang="en-US" sz="1200" dirty="0"/>
+          </a:p>
+          <a:p>
+            <a:pPr marL="342900" indent="-342900">
+              <a:buSzPct val="100000"/>
+              <a:buChar char="•"/>
+            </a:pPr>
+            <a:r>
+              <a:rPr lang="en-US" sz="1200" dirty="0">
+                <a:solidFill>
+                  <a:srgbClr val="4A4A4A"/>
+                </a:solidFill>
+                <a:latin typeface="Arial" pitchFamily="34" charset="0"/>
+                <a:ea typeface="Arial" pitchFamily="34" charset="-122"/>
+                <a:cs typeface="Arial" pitchFamily="34" charset="-120"/>
+              </a:rPr>
+              <a:t>Derechos de papelería incluidos</a:t>
+            </a:r>
+            <a:endParaRPr lang="en-US" sz="1200" dirty="0"/>
+          </a:p>
+        </p:txBody>
+      </p:sp>
     </p:spTree>
   </p:cSld>
   <p:clrMapOvr>
@@ -3551,6 +7011,129 @@
               <a:t>09 Discovery</a:t>
             </a:r>
             <a:endParaRPr lang="en-US" sz="1000" dirty="0"/>
+          </a:p>
+        </p:txBody>
+      </p:sp>
+      <p:sp>
+        <p:nvSpPr>
+          <p:cNvPr id="4" name="Text 2"/>
+          <p:cNvSpPr/>
+          <p:nvPr/>
+        </p:nvSpPr>
+        <p:spPr>
+          <a:xfrm>
+            <a:off x="457200" y="868680"/>
+            <a:ext cx="10972800" cy="502920"/>
+          </a:xfrm>
+          <a:prstGeom prst="rect">
+            <a:avLst/>
+          </a:prstGeom>
+          <a:noFill/>
+          <a:ln/>
+        </p:spPr>
+        <p:txBody>
+          <a:bodyPr wrap="square" rtlCol="0" anchor="t">
+            <a:normAutofit/>
+          </a:bodyPr>
+          <a:lstStyle/>
+          <a:p>
+            <a:pPr indent="0" marL="0">
+              <a:buNone/>
+            </a:pPr>
+            <a:r>
+              <a:rPr lang="en-US" sz="2200" b="1" dirty="0">
+                <a:solidFill>
+                  <a:srgbClr val="1A1A1A"/>
+                </a:solidFill>
+                <a:latin typeface="Arial" pitchFamily="34" charset="0"/>
+                <a:ea typeface="Arial" pitchFamily="34" charset="-122"/>
+                <a:cs typeface="Arial" pitchFamily="34" charset="-120"/>
+              </a:rPr>
+              <a:t>Descubrimiento</a:t>
+            </a:r>
+            <a:endParaRPr lang="en-US" sz="2200" dirty="0"/>
+          </a:p>
+        </p:txBody>
+      </p:sp>
+      <p:sp>
+        <p:nvSpPr>
+          <p:cNvPr id="5" name="Text 3"/>
+          <p:cNvSpPr/>
+          <p:nvPr/>
+        </p:nvSpPr>
+        <p:spPr>
+          <a:xfrm>
+            <a:off x="457200" y="1481328"/>
+            <a:ext cx="10972800" cy="502920"/>
+          </a:xfrm>
+          <a:prstGeom prst="rect">
+            <a:avLst/>
+          </a:prstGeom>
+          <a:noFill/>
+          <a:ln/>
+        </p:spPr>
+        <p:txBody>
+          <a:bodyPr wrap="square" rtlCol="0" anchor="t">
+            <a:normAutofit/>
+          </a:bodyPr>
+          <a:lstStyle/>
+          <a:p>
+            <a:pPr indent="0" marL="0">
+              <a:buNone/>
+            </a:pPr>
+            <a:r>
+              <a:rPr lang="en-US" sz="2200" b="1" dirty="0">
+                <a:solidFill>
+                  <a:srgbClr val="1A1A1A"/>
+                </a:solidFill>
+                <a:latin typeface="Arial" pitchFamily="34" charset="0"/>
+                <a:ea typeface="Arial" pitchFamily="34" charset="-122"/>
+                <a:cs typeface="Arial" pitchFamily="34" charset="-120"/>
+              </a:rPr>
+              <a:t>Preguntas para hacer en la llamada.</a:t>
+            </a:r>
+            <a:endParaRPr lang="en-US" sz="2200" dirty="0"/>
+          </a:p>
+        </p:txBody>
+      </p:sp>
+      <p:sp>
+        <p:nvSpPr>
+          <p:cNvPr id="6" name="Text 4"/>
+          <p:cNvSpPr/>
+          <p:nvPr/>
+        </p:nvSpPr>
+        <p:spPr>
+          <a:xfrm>
+            <a:off x="457200" y="2093976"/>
+            <a:ext cx="10972800" cy="502920"/>
+          </a:xfrm>
+          <a:prstGeom prst="rect">
+            <a:avLst/>
+          </a:prstGeom>
+          <a:noFill/>
+          <a:ln/>
+        </p:spPr>
+        <p:txBody>
+          <a:bodyPr wrap="square" rtlCol="0" anchor="t">
+            <a:normAutofit/>
+          </a:bodyPr>
+          <a:lstStyle/>
+          <a:p>
+            <a:pPr indent="0" marL="0">
+              <a:buNone/>
+            </a:pPr>
+            <a:r>
+              <a:rPr lang="en-US" sz="1300" dirty="0">
+                <a:solidFill>
+                  <a:srgbClr val="4A4A4A"/>
+                </a:solidFill>
+                <a:latin typeface="Arial" pitchFamily="34" charset="0"/>
+                <a:ea typeface="Arial" pitchFamily="34" charset="-122"/>
+                <a:cs typeface="Arial" pitchFamily="34" charset="-120"/>
+              </a:rPr>
+              <a:t>Siete preguntas, en orden. La primera abre cada conversación. La última cierra la mayoría.</a:t>
+            </a:r>
+            <a:endParaRPr lang="en-US" sz="1300" dirty="0"/>
           </a:p>
         </p:txBody>
       </p:sp>
